--- a/pptx_sessions_8_22/第9回_基礎編_講師用.pptx
+++ b/pptx_sessions_8_22/第9回_基礎編_講師用.pptx
@@ -1675,7 +1675,7 @@
                 <a:ea typeface="Yu Gothic UI" pitchFamily="34" charset="-122"/>
                 <a:cs typeface="Yu Gothic UI" pitchFamily="34" charset="-120"/>
               </a:rPr>
-              <a:t>〜 公式LINEの構成設計と集客導線の作り方 〜</a:t>
+              <a:t>〜 Lovable で LP をバイブコーディング+公式LINE 構成設計 〜</a:t>
             </a:r>
             <a:endParaRPr lang="en-US" sz="2400" dirty="0"/>
           </a:p>
@@ -1945,7 +1945,7 @@
                 <a:ea typeface="Yu Gothic UI" pitchFamily="34" charset="-122"/>
                 <a:cs typeface="Yu Gothic UI" pitchFamily="34" charset="-120"/>
               </a:rPr>
-              <a:t>公式LINEを「集客の入口」から「商談予約」までの導線として設計します。</a:t>
+              <a:t>Lovable で LP を自分でバイブコーディングし、その後 公式LINE の構成を AIDMA で設計します。</a:t>
             </a:r>
             <a:endParaRPr lang="en-US" sz="2000" dirty="0"/>
           </a:p>
@@ -2054,7 +2054,7 @@
                 <a:ea typeface="Yu Gothic UI" pitchFamily="34" charset="-122"/>
                 <a:cs typeface="Yu Gothic UI" pitchFamily="34" charset="-120"/>
               </a:rPr>
-              <a:t>公式LINEの全体構成を設計</a:t>
+              <a:t>Lovable で LP を作る</a:t>
             </a:r>
             <a:endParaRPr lang="en-US" sz="2400" dirty="0"/>
           </a:p>
@@ -2093,7 +2093,7 @@
                 <a:ea typeface="Yu Gothic UI" pitchFamily="34" charset="-122"/>
                 <a:cs typeface="Yu Gothic UI" pitchFamily="34" charset="-120"/>
               </a:rPr>
-              <a:t>AIDMAの法則に沿って動線を作る</a:t>
+              <a:t>AIに頼んでLPをバイブコーディング</a:t>
             </a:r>
             <a:endParaRPr lang="en-US" sz="2000" dirty="0"/>
           </a:p>
@@ -2202,7 +2202,7 @@
                 <a:ea typeface="Yu Gothic UI" pitchFamily="34" charset="-122"/>
                 <a:cs typeface="Yu Gothic UI" pitchFamily="34" charset="-120"/>
               </a:rPr>
-              <a:t>リッチメニュー+アイコンを作成</a:t>
+              <a:t>公式LINE の構成を設計</a:t>
             </a:r>
             <a:endParaRPr lang="en-US" sz="2400" dirty="0"/>
           </a:p>
@@ -2241,7 +2241,7 @@
                 <a:ea typeface="Yu Gothic UI" pitchFamily="34" charset="-122"/>
                 <a:cs typeface="Yu Gothic UI" pitchFamily="34" charset="-120"/>
               </a:rPr>
-              <a:t>AIで画像生成までやってみる</a:t>
+              <a:t>AIDMA で動線を組み立てる</a:t>
             </a:r>
             <a:endParaRPr lang="en-US" sz="2000" dirty="0"/>
           </a:p>
@@ -2389,7 +2389,7 @@
                 <a:ea typeface="Yu Gothic UI" pitchFamily="34" charset="-122"/>
                 <a:cs typeface="Yu Gothic UI" pitchFamily="34" charset="-120"/>
               </a:rPr>
-              <a:t>Lステップの構造理解だけでも体験</a:t>
+              <a:t>LP/LINE の現状棚卸しから</a:t>
             </a:r>
             <a:endParaRPr lang="en-US" sz="2000" dirty="0"/>
           </a:p>
@@ -3044,7 +3044,7 @@
                 <a:ea typeface="Yu Gothic UI" pitchFamily="34" charset="-122"/>
                 <a:cs typeface="Yu Gothic UI" pitchFamily="34" charset="-120"/>
               </a:rPr>
-              <a:t>前回の振り返り(WEBブランディングの3軸)</a:t>
+              <a:t>前回の振り返り(WEBブランディング3軸)</a:t>
             </a:r>
             <a:endParaRPr lang="en-US" sz="2000" dirty="0"/>
           </a:p>
@@ -3184,7 +3184,7 @@
                 <a:ea typeface="Yu Gothic UI" pitchFamily="34" charset="-122"/>
                 <a:cs typeface="Yu Gothic UI" pitchFamily="34" charset="-120"/>
               </a:rPr>
-              <a:t>公式LINEの基本構成をAIDMAで設計する</a:t>
+              <a:t>Lovable で LP をバイブコーディング</a:t>
             </a:r>
             <a:endParaRPr lang="en-US" sz="2000" dirty="0"/>
           </a:p>
@@ -3324,7 +3324,7 @@
                 <a:ea typeface="Yu Gothic UI" pitchFamily="34" charset="-122"/>
                 <a:cs typeface="Yu Gothic UI" pitchFamily="34" charset="-120"/>
               </a:rPr>
-              <a:t>公式LINEとLステップの違い・使い分け</a:t>
+              <a:t>LP→公式LINE→面談予約 の動線設計</a:t>
             </a:r>
             <a:endParaRPr lang="en-US" sz="2000" dirty="0"/>
           </a:p>
@@ -3464,7 +3464,7 @@
                 <a:ea typeface="Yu Gothic UI" pitchFamily="34" charset="-122"/>
                 <a:cs typeface="Yu Gothic UI" pitchFamily="34" charset="-120"/>
               </a:rPr>
-              <a:t>リッチメニュー+アイコン画像をAIで作成</a:t>
+              <a:t>公式LINE の構成を AIDMA で設計</a:t>
             </a:r>
             <a:endParaRPr lang="en-US" sz="2000" dirty="0"/>
           </a:p>
@@ -3604,7 +3604,7 @@
                 <a:ea typeface="Yu Gothic UI" pitchFamily="34" charset="-122"/>
                 <a:cs typeface="Yu Gothic UI" pitchFamily="34" charset="-120"/>
               </a:rPr>
-              <a:t>【基礎組】既存LINE/SNSの導線を棚卸し</a:t>
+              <a:t>【基礎組】今のLP/LINE/SNSの導線を棚卸し</a:t>
             </a:r>
             <a:endParaRPr lang="en-US" sz="2000" dirty="0"/>
           </a:p>
@@ -3874,7 +3874,7 @@
                 <a:ea typeface="Yu Gothic UI" pitchFamily="34" charset="-122"/>
                 <a:cs typeface="Yu Gothic UI" pitchFamily="34" charset="-120"/>
               </a:rPr>
-              <a:t>第8回でブランディング3軸ができた前提で、その3軸を活かす「公式LINE」を設計します。</a:t>
+              <a:t>第8回でブランディング3軸ができた前提で、その3軸を活かす「LPと公式LINE」を作ります。</a:t>
             </a:r>
             <a:endParaRPr lang="en-US" sz="2200" dirty="0"/>
           </a:p>
@@ -4119,7 +4119,7 @@
                 <a:ea typeface="Yu Gothic UI" pitchFamily="34" charset="-122"/>
                 <a:cs typeface="Yu Gothic UI" pitchFamily="34" charset="-120"/>
               </a:rPr>
-              <a:t>   3軸を活かして、公式LINEで「集客→教育→商談予約」の導線を作る</a:t>
+              <a:t>   3軸を反映した LP を Lovable で「バイブコーディング」して作る</a:t>
             </a:r>
             <a:endParaRPr lang="en-US" sz="2000" dirty="0"/>
           </a:p>
@@ -4136,7 +4136,7 @@
                 <a:ea typeface="Yu Gothic UI" pitchFamily="34" charset="-122"/>
                 <a:cs typeface="Yu Gothic UI" pitchFamily="34" charset="-120"/>
               </a:rPr>
-              <a:t>   AIDMAの法則をベースに構成を設計する</a:t>
+              <a:t>   公式LINE の構成を AIDMA に沿って設計し、LP→LINE→面談予約の動線を繋ぐ</a:t>
             </a:r>
             <a:endParaRPr lang="en-US" sz="2000" dirty="0"/>
           </a:p>
@@ -4367,7 +4367,7 @@
                 <a:ea typeface="Yu Gothic UI" pitchFamily="34" charset="-122"/>
                 <a:cs typeface="Yu Gothic UI" pitchFamily="34" charset="-120"/>
               </a:rPr>
-              <a:t>公式LINEの構成をAIDMAで設計する</a:t>
+              <a:t>Lovable で LP をバイブコーディング</a:t>
             </a:r>
             <a:endParaRPr lang="en-US" sz="2600" dirty="0"/>
           </a:p>
@@ -4406,7 +4406,7 @@
                 <a:ea typeface="Yu Gothic UI" pitchFamily="34" charset="-122"/>
                 <a:cs typeface="Yu Gothic UI" pitchFamily="34" charset="-120"/>
               </a:rPr>
-              <a:t>注目→興味→欲求→記憶→行動の5段階で、LINEの構成をAIと設計します。</a:t>
+              <a:t>Lovable(AIノーコードツール)に日本語で頼むだけで、3軸を反映した LP を作ります。</a:t>
             </a:r>
             <a:endParaRPr lang="en-US" sz="2000" dirty="0"/>
           </a:p>
@@ -4554,7 +4554,7 @@
                 <a:ea typeface="Yu Gothic UI" pitchFamily="34" charset="-122"/>
                 <a:cs typeface="Yu Gothic UI" pitchFamily="34" charset="-120"/>
               </a:rPr>
-              <a:t>公式LINEは作ったが、登録者が増えない／登録後の動線が決まっていない。</a:t>
+              <a:t>LPがあるとよく聞くが、Web制作の知識がなくて作れていない。3軸も整理できたので形にしたい。</a:t>
             </a:r>
             <a:endParaRPr lang="en-US" sz="2000" dirty="0"/>
           </a:p>
@@ -4632,7 +4632,7 @@
                 <a:ea typeface="Yu Gothic UI" pitchFamily="34" charset="-122"/>
                 <a:cs typeface="Yu Gothic UI" pitchFamily="34" charset="-120"/>
               </a:rPr>
-              <a:t>AIDMA別の構成設計シート(各段階で「何を見せる」「何を聞く」を整理)</a:t>
+              <a:t>3軸とAIDMAの構成を反映した LP(公開URL付き、公式LINE登録ボタン入り)</a:t>
             </a:r>
             <a:endParaRPr lang="en-US" sz="2000" dirty="0"/>
           </a:p>
@@ -4710,7 +4710,7 @@
                 <a:ea typeface="Yu Gothic UI" pitchFamily="34" charset="-122"/>
                 <a:cs typeface="Yu Gothic UI" pitchFamily="34" charset="-120"/>
               </a:rPr>
-              <a:t>各段階1行で書く／自分のブランディング3軸に沿う／LINE特有の動線(リッチメニュー・ステップ配信)を意識</a:t>
+              <a:t>Lovable を使う／プロンプトは「ブランディング3軸+ターゲット+CTA」を全部書く／文字量は読みやすさ優先</a:t>
             </a:r>
             <a:endParaRPr lang="en-US" sz="2000" dirty="0"/>
           </a:p>
@@ -4819,7 +4819,7 @@
                 <a:ea typeface="Yu Gothic UI" pitchFamily="34" charset="-122"/>
                 <a:cs typeface="Yu Gothic UI" pitchFamily="34" charset="-120"/>
               </a:rPr>
-              <a:t>1. Gemini に「保険営業の公式LINEをAIDMAで構成して」と依頼</a:t>
+              <a:t>1. Lovable にログイン →「新規プロジェクト」→ 第8回で作った3軸とターゲットを伝えて LP を依頼</a:t>
             </a:r>
             <a:endParaRPr lang="en-US" sz="2000" dirty="0"/>
           </a:p>
@@ -4858,7 +4858,7 @@
                 <a:ea typeface="Yu Gothic UI" pitchFamily="34" charset="-122"/>
                 <a:cs typeface="Yu Gothic UI" pitchFamily="34" charset="-120"/>
               </a:rPr>
-              <a:t>2. 自分の3軸と現状(登録者数・配信頻度)を伝える</a:t>
+              <a:t>2. 生成された LP の文言・色味・画像を、Lovable に追加指示しながら修正(バイブコーディング)</a:t>
             </a:r>
             <a:endParaRPr lang="en-US" sz="2000" dirty="0"/>
           </a:p>
@@ -4897,7 +4897,7 @@
                 <a:ea typeface="Yu Gothic UI" pitchFamily="34" charset="-122"/>
                 <a:cs typeface="Yu Gothic UI" pitchFamily="34" charset="-120"/>
               </a:rPr>
-              <a:t>3. 出力された構成案をスプシで一覧化し、優先順位を付ける</a:t>
+              <a:t>3. 公式LINE 登録ボタンを設置 → デプロイして公開URLを取得</a:t>
             </a:r>
             <a:endParaRPr lang="en-US" sz="2000" dirty="0"/>
           </a:p>
@@ -5128,7 +5128,7 @@
                 <a:ea typeface="Yu Gothic UI" pitchFamily="34" charset="-122"/>
                 <a:cs typeface="Yu Gothic UI" pitchFamily="34" charset="-120"/>
               </a:rPr>
-              <a:t>公式LINE / Lステップ / メルマガの違い</a:t>
+              <a:t>LP→公式LINE→面談予約 の動線設計</a:t>
             </a:r>
             <a:endParaRPr lang="en-US" sz="2600" dirty="0"/>
           </a:p>
@@ -5167,7 +5167,7 @@
                 <a:ea typeface="Yu Gothic UI" pitchFamily="34" charset="-122"/>
                 <a:cs typeface="Yu Gothic UI" pitchFamily="34" charset="-120"/>
               </a:rPr>
-              <a:t>どのツールを使うかで設計が変わります。違いと使い分けを整理します。</a:t>
+              <a:t>「来てくれた人」を「面談予約」まで連れていく動線を設計します。</a:t>
             </a:r>
             <a:endParaRPr lang="en-US" sz="2200" dirty="0"/>
           </a:p>
@@ -5237,7 +5237,7 @@
                 <a:ea typeface="Yu Gothic UI" pitchFamily="34" charset="-122"/>
                 <a:cs typeface="Yu Gothic UI" pitchFamily="34" charset="-120"/>
               </a:rPr>
-              <a:t>ツール比較と使い分け</a:t>
+              <a:t>集客動線の3段階</a:t>
             </a:r>
             <a:endParaRPr lang="en-US" sz="2200" dirty="0"/>
           </a:p>
@@ -5276,7 +5276,7 @@
                 <a:ea typeface="Yu Gothic UI" pitchFamily="34" charset="-122"/>
                 <a:cs typeface="Yu Gothic UI" pitchFamily="34" charset="-120"/>
               </a:rPr>
-              <a:t>【公式LINE(無料/有料プラン)】</a:t>
+              <a:t>【1段階目: LP】</a:t>
             </a:r>
             <a:endParaRPr lang="en-US" sz="2000" dirty="0"/>
           </a:p>
@@ -5293,7 +5293,7 @@
                 <a:ea typeface="Yu Gothic UI" pitchFamily="34" charset="-122"/>
                 <a:cs typeface="Yu Gothic UI" pitchFamily="34" charset="-120"/>
               </a:rPr>
-              <a:t>   ・配信通数に上限あり／タグ管理が限定的</a:t>
+              <a:t>   ・3軸を伝える1ページ(自己紹介+価値+CTA)</a:t>
             </a:r>
             <a:endParaRPr lang="en-US" sz="2000" dirty="0"/>
           </a:p>
@@ -5310,7 +5310,7 @@
                 <a:ea typeface="Yu Gothic UI" pitchFamily="34" charset="-122"/>
                 <a:cs typeface="Yu Gothic UI" pitchFamily="34" charset="-120"/>
               </a:rPr>
-              <a:t>   ・最初の検証フェーズに向く</a:t>
+              <a:t>   ・SNS/広告/紹介からの着地点</a:t>
             </a:r>
             <a:endParaRPr lang="en-US" sz="2000" dirty="0"/>
           </a:p>
@@ -5327,6 +5327,23 @@
                 <a:ea typeface="Yu Gothic UI" pitchFamily="34" charset="-122"/>
                 <a:cs typeface="Yu Gothic UI" pitchFamily="34" charset="-120"/>
               </a:rPr>
+              <a:t>   ・CTAは「公式LINE登録」一択にする</a:t>
+            </a:r>
+            <a:endParaRPr lang="en-US" sz="2000" dirty="0"/>
+          </a:p>
+          <a:p>
+            <a:pPr indent="0" marL="0">
+              <a:buNone/>
+            </a:pPr>
+            <a:r>
+              <a:rPr lang="en-US" sz="2000" dirty="0">
+                <a:solidFill>
+                  <a:srgbClr val="222222"/>
+                </a:solidFill>
+                <a:latin typeface="Yu Gothic UI" pitchFamily="34" charset="0"/>
+                <a:ea typeface="Yu Gothic UI" pitchFamily="34" charset="-122"/>
+                <a:cs typeface="Yu Gothic UI" pitchFamily="34" charset="-120"/>
+              </a:rPr>
               <a:t/>
             </a:r>
             <a:endParaRPr lang="en-US" sz="2000" dirty="0"/>
@@ -5344,7 +5361,7 @@
                 <a:ea typeface="Yu Gothic UI" pitchFamily="34" charset="-122"/>
                 <a:cs typeface="Yu Gothic UI" pitchFamily="34" charset="-120"/>
               </a:rPr>
-              <a:t>【Lステップ(外部ツール)】</a:t>
+              <a:t>【2段階目: 公式LINE】</a:t>
             </a:r>
             <a:endParaRPr lang="en-US" sz="2000" dirty="0"/>
           </a:p>
@@ -5361,7 +5378,7 @@
                 <a:ea typeface="Yu Gothic UI" pitchFamily="34" charset="-122"/>
                 <a:cs typeface="Yu Gothic UI" pitchFamily="34" charset="-120"/>
               </a:rPr>
-              <a:t>   ・ステップ配信・タグ管理・流入経路分析が強力</a:t>
+              <a:t>   ・登録直後のあいさつ+ステップ配信で関係構築</a:t>
             </a:r>
             <a:endParaRPr lang="en-US" sz="2000" dirty="0"/>
           </a:p>
@@ -5378,7 +5395,7 @@
                 <a:ea typeface="Yu Gothic UI" pitchFamily="34" charset="-122"/>
                 <a:cs typeface="Yu Gothic UI" pitchFamily="34" charset="-120"/>
               </a:rPr>
-              <a:t>   ・本格運用フェーズに向く</a:t>
+              <a:t>   ・興味度が上がったら面談予約へ誘導</a:t>
             </a:r>
             <a:endParaRPr lang="en-US" sz="2000" dirty="0"/>
           </a:p>
@@ -5395,6 +5412,23 @@
                 <a:ea typeface="Yu Gothic UI" pitchFamily="34" charset="-122"/>
                 <a:cs typeface="Yu Gothic UI" pitchFamily="34" charset="-120"/>
               </a:rPr>
+              <a:t>   ・AIDMA(注目→興味→欲求→記憶→行動)に沿って設計</a:t>
+            </a:r>
+            <a:endParaRPr lang="en-US" sz="2000" dirty="0"/>
+          </a:p>
+          <a:p>
+            <a:pPr indent="0" marL="0">
+              <a:buNone/>
+            </a:pPr>
+            <a:r>
+              <a:rPr lang="en-US" sz="2000" dirty="0">
+                <a:solidFill>
+                  <a:srgbClr val="222222"/>
+                </a:solidFill>
+                <a:latin typeface="Yu Gothic UI" pitchFamily="34" charset="0"/>
+                <a:ea typeface="Yu Gothic UI" pitchFamily="34" charset="-122"/>
+                <a:cs typeface="Yu Gothic UI" pitchFamily="34" charset="-120"/>
+              </a:rPr>
               <a:t/>
             </a:r>
             <a:endParaRPr lang="en-US" sz="2000" dirty="0"/>
@@ -5412,7 +5446,7 @@
                 <a:ea typeface="Yu Gothic UI" pitchFamily="34" charset="-122"/>
                 <a:cs typeface="Yu Gothic UI" pitchFamily="34" charset="-120"/>
               </a:rPr>
-              <a:t>【メルマガ】</a:t>
+              <a:t>【3段階目: 面談予約】</a:t>
             </a:r>
             <a:endParaRPr lang="en-US" sz="2000" dirty="0"/>
           </a:p>
@@ -5429,7 +5463,7 @@
                 <a:ea typeface="Yu Gothic UI" pitchFamily="34" charset="-122"/>
                 <a:cs typeface="Yu Gothic UI" pitchFamily="34" charset="-120"/>
               </a:rPr>
-              <a:t>   ・到達率は LINE より低いが、長文向き</a:t>
+              <a:t>   ・第8回で作ったアイテマスへ誘導</a:t>
             </a:r>
             <a:endParaRPr lang="en-US" sz="2000" dirty="0"/>
           </a:p>
@@ -5446,7 +5480,7 @@
                 <a:ea typeface="Yu Gothic UI" pitchFamily="34" charset="-122"/>
                 <a:cs typeface="Yu Gothic UI" pitchFamily="34" charset="-120"/>
               </a:rPr>
-              <a:t>   ・補助的に併用すると安定</a:t>
+              <a:t>   ・「無料相談」など心理的ハードルを下げる名前</a:t>
             </a:r>
             <a:endParaRPr lang="en-US" sz="2000" dirty="0"/>
           </a:p>
@@ -5480,7 +5514,7 @@
                 <a:ea typeface="Yu Gothic UI" pitchFamily="34" charset="-122"/>
                 <a:cs typeface="Yu Gothic UI" pitchFamily="34" charset="-120"/>
               </a:rPr>
-              <a:t>【選び方の目安】</a:t>
+              <a:t>【ポイント】</a:t>
             </a:r>
             <a:endParaRPr lang="en-US" sz="2000" dirty="0"/>
           </a:p>
@@ -5497,7 +5531,7 @@
                 <a:ea typeface="Yu Gothic UI" pitchFamily="34" charset="-122"/>
                 <a:cs typeface="Yu Gothic UI" pitchFamily="34" charset="-120"/>
               </a:rPr>
-              <a:t>   ・登録者100人未満 → まず公式LINE</a:t>
+              <a:t>   ・各段階を1個のCTAに絞る(選択肢を増やすと離脱する)</a:t>
             </a:r>
             <a:endParaRPr lang="en-US" sz="2000" dirty="0"/>
           </a:p>
@@ -5514,7 +5548,7 @@
                 <a:ea typeface="Yu Gothic UI" pitchFamily="34" charset="-122"/>
                 <a:cs typeface="Yu Gothic UI" pitchFamily="34" charset="-120"/>
               </a:rPr>
-              <a:t>   ・100人超 → Lステップ導入を検討</a:t>
+              <a:t>   ・LP→LINE は QR+URL の両方で導線を作る</a:t>
             </a:r>
             <a:endParaRPr lang="en-US" sz="2000" dirty="0"/>
           </a:p>
@@ -5745,7 +5779,7 @@
                 <a:ea typeface="Yu Gothic UI" pitchFamily="34" charset="-122"/>
                 <a:cs typeface="Yu Gothic UI" pitchFamily="34" charset="-120"/>
               </a:rPr>
-              <a:t>リッチメニュー+アイコンをAIで作る</a:t>
+              <a:t>公式LINE の構成を AIDMA で設計</a:t>
             </a:r>
             <a:endParaRPr lang="en-US" sz="2600" dirty="0"/>
           </a:p>
@@ -5784,7 +5818,7 @@
                 <a:ea typeface="Yu Gothic UI" pitchFamily="34" charset="-122"/>
                 <a:cs typeface="Yu Gothic UI" pitchFamily="34" charset="-120"/>
               </a:rPr>
-              <a:t>AIで画像を生成して、ブランディング3軸に沿ったリッチメニューを作ります。</a:t>
+              <a:t>注目→興味→欲求→記憶→行動の5段階で、LINE の構成を AI と設計します。</a:t>
             </a:r>
             <a:endParaRPr lang="en-US" sz="2000" dirty="0"/>
           </a:p>
@@ -5932,7 +5966,7 @@
                 <a:ea typeface="Yu Gothic UI" pitchFamily="34" charset="-122"/>
                 <a:cs typeface="Yu Gothic UI" pitchFamily="34" charset="-120"/>
               </a:rPr>
-              <a:t>リッチメニューは作ったほうがいいと聞くが、デザインの作り方が分からない。</a:t>
+              <a:t>公式LINE は作ったが、登録者の動線が決まっていない。LP からの流入も活かせていない。</a:t>
             </a:r>
             <a:endParaRPr lang="en-US" sz="2000" dirty="0"/>
           </a:p>
@@ -6010,7 +6044,7 @@
                 <a:ea typeface="Yu Gothic UI" pitchFamily="34" charset="-122"/>
                 <a:cs typeface="Yu Gothic UI" pitchFamily="34" charset="-120"/>
               </a:rPr>
-              <a:t>AI生成画像を使ったリッチメニュー1枚(6分割または4分割)+ アイコン画像</a:t>
+              <a:t>AIDMA別の構成設計シート(各段階で「何を見せる」「何を聞く」を整理)</a:t>
             </a:r>
             <a:endParaRPr lang="en-US" sz="2000" dirty="0"/>
           </a:p>
@@ -6088,7 +6122,7 @@
                 <a:ea typeface="Yu Gothic UI" pitchFamily="34" charset="-122"/>
                 <a:cs typeface="Yu Gothic UI" pitchFamily="34" charset="-120"/>
               </a:rPr>
-              <a:t>画像生成は Gemini / Genspark / Canva 等のいずれか／3軸のトーンに合わせる／文字は最小限</a:t>
+              <a:t>各段階1行で書く／自分のブランディング3軸に沿う／LINE特有の動線(リッチメニュー・ステップ配信)を意識</a:t>
             </a:r>
             <a:endParaRPr lang="en-US" sz="2000" dirty="0"/>
           </a:p>
@@ -6197,7 +6231,7 @@
                 <a:ea typeface="Yu Gothic UI" pitchFamily="34" charset="-122"/>
                 <a:cs typeface="Yu Gothic UI" pitchFamily="34" charset="-120"/>
               </a:rPr>
-              <a:t>1. Gemini に「3軸を踏まえたリッチメニューのレイアウト案」を出してもらう</a:t>
+              <a:t>1. Gemini に「保険営業の公式LINEを AIDMA で構成して」と依頼</a:t>
             </a:r>
             <a:endParaRPr lang="en-US" sz="2000" dirty="0"/>
           </a:p>
@@ -6236,7 +6270,7 @@
                 <a:ea typeface="Yu Gothic UI" pitchFamily="34" charset="-122"/>
                 <a:cs typeface="Yu Gothic UI" pitchFamily="34" charset="-120"/>
               </a:rPr>
-              <a:t>2. 画像生成AIで背景画像・アイコンを生成</a:t>
+              <a:t>2. 自分の3軸と LP の URL を共有して構成を組ませる</a:t>
             </a:r>
             <a:endParaRPr lang="en-US" sz="2000" dirty="0"/>
           </a:p>
@@ -6275,7 +6309,7 @@
                 <a:ea typeface="Yu Gothic UI" pitchFamily="34" charset="-122"/>
                 <a:cs typeface="Yu Gothic UI" pitchFamily="34" charset="-120"/>
               </a:rPr>
-              <a:t>3. Canva 等でリッチメニュー画像を組み立てて公式LINEにアップロード</a:t>
+              <a:t>3. 出力された構成案をスプシで一覧化し、優先順位を付ける</a:t>
             </a:r>
             <a:endParaRPr lang="en-US" sz="2000" dirty="0"/>
           </a:p>
@@ -6506,7 +6540,7 @@
                 <a:ea typeface="Yu Gothic UI" pitchFamily="34" charset="-122"/>
                 <a:cs typeface="Yu Gothic UI" pitchFamily="34" charset="-120"/>
               </a:rPr>
-              <a:t>【基礎組】既存LINE/SNSの導線を棚卸し</a:t>
+              <a:t>【基礎組】今のLP/LINE/SNSの導線を棚卸し</a:t>
             </a:r>
             <a:endParaRPr lang="en-US" sz="2600" dirty="0"/>
           </a:p>
@@ -6693,7 +6727,7 @@
                 <a:ea typeface="Yu Gothic UI" pitchFamily="34" charset="-122"/>
                 <a:cs typeface="Yu Gothic UI" pitchFamily="34" charset="-120"/>
               </a:rPr>
-              <a:t>公式LINEはあるが、そこに人がどう来てどう動いているかを把握できていない。</a:t>
+              <a:t>LP/LINE/SNS は持っているが、それぞれがどう繋がっているか把握できていない。</a:t>
             </a:r>
             <a:endParaRPr lang="en-US" sz="2000" dirty="0"/>
           </a:p>
@@ -6958,7 +6992,7 @@
                 <a:ea typeface="Yu Gothic UI" pitchFamily="34" charset="-122"/>
                 <a:cs typeface="Yu Gothic UI" pitchFamily="34" charset="-120"/>
               </a:rPr>
-              <a:t>1. 過去3ヶ月の登録者の流入元を思い出す/データで確認</a:t>
+              <a:t>1. 過去3ヶ月の流入元を思い出す/データで確認</a:t>
             </a:r>
             <a:endParaRPr lang="en-US" sz="2000" dirty="0"/>
           </a:p>

--- a/pptx_sessions_8_22/第9回_基礎編_講師用.pptx
+++ b/pptx_sessions_8_22/第9回_基礎編_講師用.pptx
@@ -1531,7 +1531,9 @@
           </a:ln>
         </p:spPr>
         <p:txBody>
-          <a:bodyPr/>
+          <a:bodyPr wrap="square">
+            <a:normAutofit/>
+          </a:bodyPr>
           <a:p/>
         </p:txBody>
       </p:sp>
@@ -1560,7 +1562,9 @@
           </a:ln>
         </p:spPr>
         <p:txBody>
-          <a:bodyPr/>
+          <a:bodyPr wrap="square">
+            <a:normAutofit/>
+          </a:bodyPr>
           <a:p/>
         </p:txBody>
       </p:sp>
@@ -1582,7 +1586,9 @@
           <a:ln/>
         </p:spPr>
         <p:txBody>
-          <a:bodyPr wrap="square" rtlCol="0" anchor="ctr"/>
+          <a:bodyPr wrap="square" rtlCol="0" anchor="ctr">
+            <a:normAutofit/>
+          </a:bodyPr>
           <a:lstStyle/>
           <a:p>
             <a:pPr algn="ctr" indent="0" marL="0">
@@ -1621,7 +1627,9 @@
           <a:ln/>
         </p:spPr>
         <p:txBody>
-          <a:bodyPr wrap="square" rtlCol="0" anchor="ctr"/>
+          <a:bodyPr wrap="square" rtlCol="0" anchor="ctr">
+            <a:normAutofit/>
+          </a:bodyPr>
           <a:lstStyle/>
           <a:p>
             <a:pPr algn="ctr" indent="0" marL="0">
@@ -1660,7 +1668,9 @@
           <a:ln/>
         </p:spPr>
         <p:txBody>
-          <a:bodyPr wrap="square" rtlCol="0" anchor="ctr"/>
+          <a:bodyPr wrap="square" rtlCol="0" anchor="ctr">
+            <a:normAutofit/>
+          </a:bodyPr>
           <a:lstStyle/>
           <a:p>
             <a:pPr algn="ctr" indent="0" marL="0">
@@ -1699,7 +1709,9 @@
           <a:ln/>
         </p:spPr>
         <p:txBody>
-          <a:bodyPr wrap="square" rtlCol="0" anchor="ctr"/>
+          <a:bodyPr wrap="square" rtlCol="0" anchor="ctr">
+            <a:normAutofit/>
+          </a:bodyPr>
           <a:lstStyle/>
           <a:p>
             <a:pPr algn="ctr" indent="0" marL="0">
@@ -1747,7 +1759,9 @@
           </a:ln>
         </p:spPr>
         <p:txBody>
-          <a:bodyPr/>
+          <a:bodyPr wrap="square">
+            <a:normAutofit/>
+          </a:bodyPr>
           <a:p/>
         </p:txBody>
       </p:sp>
@@ -1769,7 +1783,9 @@
           <a:ln/>
         </p:spPr>
         <p:txBody>
-          <a:bodyPr wrap="square" rtlCol="0" anchor="ctr"/>
+          <a:bodyPr wrap="square" rtlCol="0" anchor="ctr">
+            <a:normAutofit/>
+          </a:bodyPr>
           <a:lstStyle/>
           <a:p>
             <a:pPr algn="ctr" indent="0" marL="0">
@@ -1840,7 +1856,9 @@
           </a:ln>
         </p:spPr>
         <p:txBody>
-          <a:bodyPr/>
+          <a:bodyPr wrap="square">
+            <a:normAutofit/>
+          </a:bodyPr>
           <a:p/>
         </p:txBody>
       </p:sp>
@@ -1869,7 +1887,9 @@
           </a:ln>
         </p:spPr>
         <p:txBody>
-          <a:bodyPr/>
+          <a:bodyPr wrap="square">
+            <a:normAutofit/>
+          </a:bodyPr>
           <a:p/>
         </p:txBody>
       </p:sp>
@@ -1891,7 +1911,9 @@
           <a:ln/>
         </p:spPr>
         <p:txBody>
-          <a:bodyPr wrap="square" rtlCol="0" anchor="ctr"/>
+          <a:bodyPr wrap="square" rtlCol="0" anchor="ctr">
+            <a:normAutofit/>
+          </a:bodyPr>
           <a:lstStyle/>
           <a:p>
             <a:pPr indent="0" marL="0">
@@ -1930,7 +1952,9 @@
           <a:ln/>
         </p:spPr>
         <p:txBody>
-          <a:bodyPr wrap="square" rtlCol="0" anchor="ctr"/>
+          <a:bodyPr wrap="square" rtlCol="0" anchor="ctr">
+            <a:normAutofit/>
+          </a:bodyPr>
           <a:lstStyle/>
           <a:p>
             <a:pPr indent="0" marL="0">
@@ -1978,7 +2002,9 @@
           </a:ln>
         </p:spPr>
         <p:txBody>
-          <a:bodyPr/>
+          <a:bodyPr wrap="square">
+            <a:normAutofit/>
+          </a:bodyPr>
           <a:p/>
         </p:txBody>
       </p:sp>
@@ -2000,7 +2026,9 @@
           <a:ln/>
         </p:spPr>
         <p:txBody>
-          <a:bodyPr wrap="square" rtlCol="0" anchor="ctr"/>
+          <a:bodyPr wrap="square" rtlCol="0" anchor="ctr">
+            <a:normAutofit/>
+          </a:bodyPr>
           <a:lstStyle/>
           <a:p>
             <a:pPr indent="0" marL="0">
@@ -2039,7 +2067,9 @@
           <a:ln/>
         </p:spPr>
         <p:txBody>
-          <a:bodyPr wrap="square" rtlCol="0" anchor="ctr"/>
+          <a:bodyPr wrap="square" rtlCol="0" anchor="ctr">
+            <a:normAutofit/>
+          </a:bodyPr>
           <a:lstStyle/>
           <a:p>
             <a:pPr indent="0" marL="0">
@@ -2078,7 +2108,9 @@
           <a:ln/>
         </p:spPr>
         <p:txBody>
-          <a:bodyPr wrap="square" rtlCol="0" anchor="ctr"/>
+          <a:bodyPr wrap="square" rtlCol="0" anchor="ctr">
+            <a:normAutofit/>
+          </a:bodyPr>
           <a:lstStyle/>
           <a:p>
             <a:pPr indent="0" marL="0">
@@ -2126,7 +2158,9 @@
           </a:ln>
         </p:spPr>
         <p:txBody>
-          <a:bodyPr/>
+          <a:bodyPr wrap="square">
+            <a:normAutofit/>
+          </a:bodyPr>
           <a:p/>
         </p:txBody>
       </p:sp>
@@ -2148,7 +2182,9 @@
           <a:ln/>
         </p:spPr>
         <p:txBody>
-          <a:bodyPr wrap="square" rtlCol="0" anchor="ctr"/>
+          <a:bodyPr wrap="square" rtlCol="0" anchor="ctr">
+            <a:normAutofit/>
+          </a:bodyPr>
           <a:lstStyle/>
           <a:p>
             <a:pPr indent="0" marL="0">
@@ -2187,7 +2223,9 @@
           <a:ln/>
         </p:spPr>
         <p:txBody>
-          <a:bodyPr wrap="square" rtlCol="0" anchor="ctr"/>
+          <a:bodyPr wrap="square" rtlCol="0" anchor="ctr">
+            <a:normAutofit/>
+          </a:bodyPr>
           <a:lstStyle/>
           <a:p>
             <a:pPr indent="0" marL="0">
@@ -2226,7 +2264,9 @@
           <a:ln/>
         </p:spPr>
         <p:txBody>
-          <a:bodyPr wrap="square" rtlCol="0" anchor="ctr"/>
+          <a:bodyPr wrap="square" rtlCol="0" anchor="ctr">
+            <a:normAutofit/>
+          </a:bodyPr>
           <a:lstStyle/>
           <a:p>
             <a:pPr indent="0" marL="0">
@@ -2274,7 +2314,9 @@
           </a:ln>
         </p:spPr>
         <p:txBody>
-          <a:bodyPr/>
+          <a:bodyPr wrap="square">
+            <a:normAutofit/>
+          </a:bodyPr>
           <a:p/>
         </p:txBody>
       </p:sp>
@@ -2296,7 +2338,9 @@
           <a:ln/>
         </p:spPr>
         <p:txBody>
-          <a:bodyPr wrap="square" rtlCol="0" anchor="ctr"/>
+          <a:bodyPr wrap="square" rtlCol="0" anchor="ctr">
+            <a:normAutofit/>
+          </a:bodyPr>
           <a:lstStyle/>
           <a:p>
             <a:pPr indent="0" marL="0">
@@ -2335,7 +2379,9 @@
           <a:ln/>
         </p:spPr>
         <p:txBody>
-          <a:bodyPr wrap="square" rtlCol="0" anchor="ctr"/>
+          <a:bodyPr wrap="square" rtlCol="0" anchor="ctr">
+            <a:normAutofit/>
+          </a:bodyPr>
           <a:lstStyle/>
           <a:p>
             <a:pPr indent="0" marL="0">
@@ -2374,7 +2420,9 @@
           <a:ln/>
         </p:spPr>
         <p:txBody>
-          <a:bodyPr wrap="square" rtlCol="0" anchor="ctr"/>
+          <a:bodyPr wrap="square" rtlCol="0" anchor="ctr">
+            <a:normAutofit/>
+          </a:bodyPr>
           <a:lstStyle/>
           <a:p>
             <a:pPr indent="0" marL="0">
@@ -2413,7 +2461,9 @@
           <a:ln/>
         </p:spPr>
         <p:txBody>
-          <a:bodyPr wrap="square" rtlCol="0" anchor="ctr"/>
+          <a:bodyPr wrap="square" rtlCol="0" anchor="ctr">
+            <a:normAutofit/>
+          </a:bodyPr>
           <a:lstStyle/>
           <a:p>
             <a:pPr algn="r" indent="0" marL="0">
@@ -2484,7 +2534,9 @@
           </a:ln>
         </p:spPr>
         <p:txBody>
-          <a:bodyPr/>
+          <a:bodyPr wrap="square">
+            <a:normAutofit/>
+          </a:bodyPr>
           <a:p/>
         </p:txBody>
       </p:sp>
@@ -2513,7 +2565,9 @@
           </a:ln>
         </p:spPr>
         <p:txBody>
-          <a:bodyPr/>
+          <a:bodyPr wrap="square">
+            <a:normAutofit/>
+          </a:bodyPr>
           <a:p/>
         </p:txBody>
       </p:sp>
@@ -2535,7 +2589,9 @@
           <a:ln/>
         </p:spPr>
         <p:txBody>
-          <a:bodyPr wrap="square" rtlCol="0" anchor="ctr"/>
+          <a:bodyPr wrap="square" rtlCol="0" anchor="ctr">
+            <a:normAutofit/>
+          </a:bodyPr>
           <a:lstStyle/>
           <a:p>
             <a:pPr indent="0" marL="0">
@@ -2574,7 +2630,9 @@
           <a:ln/>
         </p:spPr>
         <p:txBody>
-          <a:bodyPr wrap="square" rtlCol="0" anchor="ctr"/>
+          <a:bodyPr wrap="square" rtlCol="0" anchor="ctr">
+            <a:normAutofit/>
+          </a:bodyPr>
           <a:lstStyle/>
           <a:p>
             <a:pPr indent="0" marL="0">
@@ -2620,7 +2678,9 @@
           </a:ln>
         </p:spPr>
         <p:txBody>
-          <a:bodyPr/>
+          <a:bodyPr wrap="square">
+            <a:normAutofit/>
+          </a:bodyPr>
           <a:p/>
         </p:txBody>
       </p:sp>
@@ -2651,7 +2711,9 @@
           </a:ln>
         </p:spPr>
         <p:txBody>
-          <a:bodyPr/>
+          <a:bodyPr wrap="square">
+            <a:normAutofit/>
+          </a:bodyPr>
           <a:p/>
         </p:txBody>
       </p:sp>
@@ -2673,7 +2735,9 @@
           <a:ln/>
         </p:spPr>
         <p:txBody>
-          <a:bodyPr wrap="square" rtlCol="0" anchor="ctr"/>
+          <a:bodyPr wrap="square" rtlCol="0" anchor="ctr">
+            <a:normAutofit/>
+          </a:bodyPr>
           <a:lstStyle/>
           <a:p>
             <a:pPr algn="ctr" indent="0" marL="0">
@@ -2712,7 +2776,9 @@
           <a:ln/>
         </p:spPr>
         <p:txBody>
-          <a:bodyPr wrap="square" rtlCol="0" anchor="ctr"/>
+          <a:bodyPr wrap="square" rtlCol="0" anchor="ctr">
+            <a:normAutofit/>
+          </a:bodyPr>
           <a:lstStyle/>
           <a:p>
             <a:pPr indent="0" marL="0">
@@ -2758,7 +2824,9 @@
           </a:ln>
         </p:spPr>
         <p:txBody>
-          <a:bodyPr/>
+          <a:bodyPr wrap="square">
+            <a:normAutofit/>
+          </a:bodyPr>
           <a:p/>
         </p:txBody>
       </p:sp>
@@ -2789,7 +2857,9 @@
           </a:ln>
         </p:spPr>
         <p:txBody>
-          <a:bodyPr/>
+          <a:bodyPr wrap="square">
+            <a:normAutofit/>
+          </a:bodyPr>
           <a:p/>
         </p:txBody>
       </p:sp>
@@ -2811,7 +2881,9 @@
           <a:ln/>
         </p:spPr>
         <p:txBody>
-          <a:bodyPr wrap="square" rtlCol="0" anchor="ctr"/>
+          <a:bodyPr wrap="square" rtlCol="0" anchor="ctr">
+            <a:normAutofit/>
+          </a:bodyPr>
           <a:lstStyle/>
           <a:p>
             <a:pPr algn="ctr" indent="0" marL="0">
@@ -2850,7 +2922,9 @@
           <a:ln/>
         </p:spPr>
         <p:txBody>
-          <a:bodyPr wrap="square" rtlCol="0" anchor="ctr"/>
+          <a:bodyPr wrap="square" rtlCol="0" anchor="ctr">
+            <a:normAutofit/>
+          </a:bodyPr>
           <a:lstStyle/>
           <a:p>
             <a:pPr indent="0" marL="0">
@@ -2889,7 +2963,9 @@
           <a:ln/>
         </p:spPr>
         <p:txBody>
-          <a:bodyPr wrap="square" rtlCol="0" anchor="ctr"/>
+          <a:bodyPr wrap="square" rtlCol="0" anchor="ctr">
+            <a:normAutofit/>
+          </a:bodyPr>
           <a:lstStyle/>
           <a:p>
             <a:pPr indent="0" marL="0">
@@ -2937,7 +3013,9 @@
           </a:ln>
         </p:spPr>
         <p:txBody>
-          <a:bodyPr/>
+          <a:bodyPr wrap="square">
+            <a:normAutofit/>
+          </a:bodyPr>
           <a:p/>
         </p:txBody>
       </p:sp>
@@ -2968,7 +3046,9 @@
           </a:ln>
         </p:spPr>
         <p:txBody>
-          <a:bodyPr/>
+          <a:bodyPr wrap="square">
+            <a:normAutofit/>
+          </a:bodyPr>
           <a:p/>
         </p:txBody>
       </p:sp>
@@ -2990,7 +3070,9 @@
           <a:ln/>
         </p:spPr>
         <p:txBody>
-          <a:bodyPr wrap="square" rtlCol="0" anchor="ctr"/>
+          <a:bodyPr wrap="square" rtlCol="0" anchor="ctr">
+            <a:normAutofit/>
+          </a:bodyPr>
           <a:lstStyle/>
           <a:p>
             <a:pPr algn="ctr" indent="0" marL="0">
@@ -3029,7 +3111,9 @@
           <a:ln/>
         </p:spPr>
         <p:txBody>
-          <a:bodyPr wrap="square" rtlCol="0" anchor="ctr"/>
+          <a:bodyPr wrap="square" rtlCol="0" anchor="ctr">
+            <a:normAutofit/>
+          </a:bodyPr>
           <a:lstStyle/>
           <a:p>
             <a:pPr indent="0" marL="0">
@@ -3077,7 +3161,9 @@
           </a:ln>
         </p:spPr>
         <p:txBody>
-          <a:bodyPr/>
+          <a:bodyPr wrap="square">
+            <a:normAutofit/>
+          </a:bodyPr>
           <a:p/>
         </p:txBody>
       </p:sp>
@@ -3108,7 +3194,9 @@
           </a:ln>
         </p:spPr>
         <p:txBody>
-          <a:bodyPr/>
+          <a:bodyPr wrap="square">
+            <a:normAutofit/>
+          </a:bodyPr>
           <a:p/>
         </p:txBody>
       </p:sp>
@@ -3130,7 +3218,9 @@
           <a:ln/>
         </p:spPr>
         <p:txBody>
-          <a:bodyPr wrap="square" rtlCol="0" anchor="ctr"/>
+          <a:bodyPr wrap="square" rtlCol="0" anchor="ctr">
+            <a:normAutofit/>
+          </a:bodyPr>
           <a:lstStyle/>
           <a:p>
             <a:pPr algn="ctr" indent="0" marL="0">
@@ -3169,7 +3259,9 @@
           <a:ln/>
         </p:spPr>
         <p:txBody>
-          <a:bodyPr wrap="square" rtlCol="0" anchor="ctr"/>
+          <a:bodyPr wrap="square" rtlCol="0" anchor="ctr">
+            <a:normAutofit/>
+          </a:bodyPr>
           <a:lstStyle/>
           <a:p>
             <a:pPr indent="0" marL="0">
@@ -3217,7 +3309,9 @@
           </a:ln>
         </p:spPr>
         <p:txBody>
-          <a:bodyPr/>
+          <a:bodyPr wrap="square">
+            <a:normAutofit/>
+          </a:bodyPr>
           <a:p/>
         </p:txBody>
       </p:sp>
@@ -3248,7 +3342,9 @@
           </a:ln>
         </p:spPr>
         <p:txBody>
-          <a:bodyPr/>
+          <a:bodyPr wrap="square">
+            <a:normAutofit/>
+          </a:bodyPr>
           <a:p/>
         </p:txBody>
       </p:sp>
@@ -3270,7 +3366,9 @@
           <a:ln/>
         </p:spPr>
         <p:txBody>
-          <a:bodyPr wrap="square" rtlCol="0" anchor="ctr"/>
+          <a:bodyPr wrap="square" rtlCol="0" anchor="ctr">
+            <a:normAutofit/>
+          </a:bodyPr>
           <a:lstStyle/>
           <a:p>
             <a:pPr algn="ctr" indent="0" marL="0">
@@ -3309,7 +3407,9 @@
           <a:ln/>
         </p:spPr>
         <p:txBody>
-          <a:bodyPr wrap="square" rtlCol="0" anchor="ctr"/>
+          <a:bodyPr wrap="square" rtlCol="0" anchor="ctr">
+            <a:normAutofit/>
+          </a:bodyPr>
           <a:lstStyle/>
           <a:p>
             <a:pPr indent="0" marL="0">
@@ -3357,7 +3457,9 @@
           </a:ln>
         </p:spPr>
         <p:txBody>
-          <a:bodyPr/>
+          <a:bodyPr wrap="square">
+            <a:normAutofit/>
+          </a:bodyPr>
           <a:p/>
         </p:txBody>
       </p:sp>
@@ -3388,7 +3490,9 @@
           </a:ln>
         </p:spPr>
         <p:txBody>
-          <a:bodyPr/>
+          <a:bodyPr wrap="square">
+            <a:normAutofit/>
+          </a:bodyPr>
           <a:p/>
         </p:txBody>
       </p:sp>
@@ -3410,7 +3514,9 @@
           <a:ln/>
         </p:spPr>
         <p:txBody>
-          <a:bodyPr wrap="square" rtlCol="0" anchor="ctr"/>
+          <a:bodyPr wrap="square" rtlCol="0" anchor="ctr">
+            <a:normAutofit/>
+          </a:bodyPr>
           <a:lstStyle/>
           <a:p>
             <a:pPr algn="ctr" indent="0" marL="0">
@@ -3449,7 +3555,9 @@
           <a:ln/>
         </p:spPr>
         <p:txBody>
-          <a:bodyPr wrap="square" rtlCol="0" anchor="ctr"/>
+          <a:bodyPr wrap="square" rtlCol="0" anchor="ctr">
+            <a:normAutofit/>
+          </a:bodyPr>
           <a:lstStyle/>
           <a:p>
             <a:pPr indent="0" marL="0">
@@ -3497,7 +3605,9 @@
           </a:ln>
         </p:spPr>
         <p:txBody>
-          <a:bodyPr/>
+          <a:bodyPr wrap="square">
+            <a:normAutofit/>
+          </a:bodyPr>
           <a:p/>
         </p:txBody>
       </p:sp>
@@ -3528,7 +3638,9 @@
           </a:ln>
         </p:spPr>
         <p:txBody>
-          <a:bodyPr/>
+          <a:bodyPr wrap="square">
+            <a:normAutofit/>
+          </a:bodyPr>
           <a:p/>
         </p:txBody>
       </p:sp>
@@ -3550,7 +3662,9 @@
           <a:ln/>
         </p:spPr>
         <p:txBody>
-          <a:bodyPr wrap="square" rtlCol="0" anchor="ctr"/>
+          <a:bodyPr wrap="square" rtlCol="0" anchor="ctr">
+            <a:normAutofit/>
+          </a:bodyPr>
           <a:lstStyle/>
           <a:p>
             <a:pPr algn="ctr" indent="0" marL="0">
@@ -3589,7 +3703,9 @@
           <a:ln/>
         </p:spPr>
         <p:txBody>
-          <a:bodyPr wrap="square" rtlCol="0" anchor="ctr"/>
+          <a:bodyPr wrap="square" rtlCol="0" anchor="ctr">
+            <a:normAutofit/>
+          </a:bodyPr>
           <a:lstStyle/>
           <a:p>
             <a:pPr indent="0" marL="0">
@@ -3628,7 +3744,9 @@
           <a:ln/>
         </p:spPr>
         <p:txBody>
-          <a:bodyPr wrap="square" rtlCol="0" anchor="ctr"/>
+          <a:bodyPr wrap="square" rtlCol="0" anchor="ctr">
+            <a:normAutofit/>
+          </a:bodyPr>
           <a:lstStyle/>
           <a:p>
             <a:pPr algn="r" indent="0" marL="0">
@@ -3699,7 +3817,9 @@
           </a:ln>
         </p:spPr>
         <p:txBody>
-          <a:bodyPr/>
+          <a:bodyPr wrap="square">
+            <a:normAutofit/>
+          </a:bodyPr>
           <a:p/>
         </p:txBody>
       </p:sp>
@@ -3728,7 +3848,9 @@
           </a:ln>
         </p:spPr>
         <p:txBody>
-          <a:bodyPr/>
+          <a:bodyPr wrap="square">
+            <a:normAutofit/>
+          </a:bodyPr>
           <a:p/>
         </p:txBody>
       </p:sp>
@@ -3759,7 +3881,9 @@
           </a:ln>
         </p:spPr>
         <p:txBody>
-          <a:bodyPr/>
+          <a:bodyPr wrap="square">
+            <a:normAutofit/>
+          </a:bodyPr>
           <a:p/>
         </p:txBody>
       </p:sp>
@@ -3781,7 +3905,9 @@
           <a:ln/>
         </p:spPr>
         <p:txBody>
-          <a:bodyPr wrap="square" rtlCol="0" anchor="ctr"/>
+          <a:bodyPr wrap="square" rtlCol="0" anchor="ctr">
+            <a:normAutofit/>
+          </a:bodyPr>
           <a:lstStyle/>
           <a:p>
             <a:pPr algn="ctr" indent="0" marL="0">
@@ -3820,7 +3946,9 @@
           <a:ln/>
         </p:spPr>
         <p:txBody>
-          <a:bodyPr wrap="square" rtlCol="0" anchor="ctr"/>
+          <a:bodyPr wrap="square" rtlCol="0" anchor="ctr">
+            <a:normAutofit/>
+          </a:bodyPr>
           <a:lstStyle/>
           <a:p>
             <a:pPr indent="0" marL="0">
@@ -3859,7 +3987,9 @@
           <a:ln/>
         </p:spPr>
         <p:txBody>
-          <a:bodyPr wrap="square" rtlCol="0" anchor="ctr"/>
+          <a:bodyPr wrap="square" rtlCol="0" anchor="ctr">
+            <a:normAutofit/>
+          </a:bodyPr>
           <a:lstStyle/>
           <a:p>
             <a:pPr indent="0" marL="0">
@@ -3907,7 +4037,9 @@
           </a:ln>
         </p:spPr>
         <p:txBody>
-          <a:bodyPr/>
+          <a:bodyPr wrap="square">
+            <a:normAutofit/>
+          </a:bodyPr>
           <a:p/>
         </p:txBody>
       </p:sp>
@@ -3929,7 +4061,9 @@
           <a:ln/>
         </p:spPr>
         <p:txBody>
-          <a:bodyPr wrap="square" rtlCol="0" anchor="ctr"/>
+          <a:bodyPr wrap="square" rtlCol="0" anchor="ctr">
+            <a:normAutofit/>
+          </a:bodyPr>
           <a:lstStyle/>
           <a:p>
             <a:pPr indent="0" marL="0">
@@ -3968,7 +4102,9 @@
           <a:ln/>
         </p:spPr>
         <p:txBody>
-          <a:bodyPr wrap="square" rtlCol="0" anchor="t"/>
+          <a:bodyPr wrap="square" rtlCol="0" anchor="t">
+            <a:normAutofit/>
+          </a:bodyPr>
           <a:lstStyle/>
           <a:p>
             <a:pPr indent="0" marL="0">
@@ -4160,7 +4296,9 @@
           <a:ln/>
         </p:spPr>
         <p:txBody>
-          <a:bodyPr wrap="square" rtlCol="0" anchor="ctr"/>
+          <a:bodyPr wrap="square" rtlCol="0" anchor="ctr">
+            <a:normAutofit/>
+          </a:bodyPr>
           <a:lstStyle/>
           <a:p>
             <a:pPr algn="r" indent="0" marL="0">
@@ -4231,7 +4369,9 @@
           </a:ln>
         </p:spPr>
         <p:txBody>
-          <a:bodyPr/>
+          <a:bodyPr wrap="square">
+            <a:normAutofit/>
+          </a:bodyPr>
           <a:p/>
         </p:txBody>
       </p:sp>
@@ -4260,7 +4400,9 @@
           </a:ln>
         </p:spPr>
         <p:txBody>
-          <a:bodyPr/>
+          <a:bodyPr wrap="square">
+            <a:normAutofit/>
+          </a:bodyPr>
           <a:p/>
         </p:txBody>
       </p:sp>
@@ -4291,7 +4433,9 @@
           </a:ln>
         </p:spPr>
         <p:txBody>
-          <a:bodyPr/>
+          <a:bodyPr wrap="square">
+            <a:normAutofit/>
+          </a:bodyPr>
           <a:p/>
         </p:txBody>
       </p:sp>
@@ -4313,7 +4457,9 @@
           <a:ln/>
         </p:spPr>
         <p:txBody>
-          <a:bodyPr wrap="square" rtlCol="0" anchor="ctr"/>
+          <a:bodyPr wrap="square" rtlCol="0" anchor="ctr">
+            <a:normAutofit/>
+          </a:bodyPr>
           <a:lstStyle/>
           <a:p>
             <a:pPr algn="ctr" indent="0" marL="0">
@@ -4352,7 +4498,9 @@
           <a:ln/>
         </p:spPr>
         <p:txBody>
-          <a:bodyPr wrap="square" rtlCol="0" anchor="ctr"/>
+          <a:bodyPr wrap="square" rtlCol="0" anchor="ctr">
+            <a:normAutofit/>
+          </a:bodyPr>
           <a:lstStyle/>
           <a:p>
             <a:pPr indent="0" marL="0">
@@ -4391,7 +4539,9 @@
           <a:ln/>
         </p:spPr>
         <p:txBody>
-          <a:bodyPr wrap="square" rtlCol="0" anchor="ctr"/>
+          <a:bodyPr wrap="square" rtlCol="0" anchor="ctr">
+            <a:normAutofit/>
+          </a:bodyPr>
           <a:lstStyle/>
           <a:p>
             <a:pPr indent="0" marL="0">
@@ -4439,7 +4589,9 @@
           </a:ln>
         </p:spPr>
         <p:txBody>
-          <a:bodyPr/>
+          <a:bodyPr wrap="square">
+            <a:normAutofit/>
+          </a:bodyPr>
           <a:p/>
         </p:txBody>
       </p:sp>
@@ -4461,7 +4613,9 @@
           <a:ln/>
         </p:spPr>
         <p:txBody>
-          <a:bodyPr wrap="square" rtlCol="0" anchor="ctr"/>
+          <a:bodyPr wrap="square" rtlCol="0" anchor="ctr">
+            <a:normAutofit/>
+          </a:bodyPr>
           <a:lstStyle/>
           <a:p>
             <a:pPr indent="0" marL="0">
@@ -4500,7 +4654,9 @@
           <a:ln/>
         </p:spPr>
         <p:txBody>
-          <a:bodyPr wrap="square" rtlCol="0" anchor="ctr"/>
+          <a:bodyPr wrap="square" rtlCol="0" anchor="ctr">
+            <a:normAutofit/>
+          </a:bodyPr>
           <a:lstStyle/>
           <a:p>
             <a:pPr indent="0" marL="0">
@@ -4539,7 +4695,9 @@
           <a:ln/>
         </p:spPr>
         <p:txBody>
-          <a:bodyPr wrap="square" rtlCol="0" anchor="t"/>
+          <a:bodyPr wrap="square" rtlCol="0" anchor="t">
+            <a:normAutofit/>
+          </a:bodyPr>
           <a:lstStyle/>
           <a:p>
             <a:pPr indent="0" marL="0">
@@ -4578,7 +4736,9 @@
           <a:ln/>
         </p:spPr>
         <p:txBody>
-          <a:bodyPr wrap="square" rtlCol="0" anchor="ctr"/>
+          <a:bodyPr wrap="square" rtlCol="0" anchor="ctr">
+            <a:normAutofit/>
+          </a:bodyPr>
           <a:lstStyle/>
           <a:p>
             <a:pPr indent="0" marL="0">
@@ -4617,7 +4777,9 @@
           <a:ln/>
         </p:spPr>
         <p:txBody>
-          <a:bodyPr wrap="square" rtlCol="0" anchor="t"/>
+          <a:bodyPr wrap="square" rtlCol="0" anchor="t">
+            <a:normAutofit/>
+          </a:bodyPr>
           <a:lstStyle/>
           <a:p>
             <a:pPr indent="0" marL="0">
@@ -4656,7 +4818,9 @@
           <a:ln/>
         </p:spPr>
         <p:txBody>
-          <a:bodyPr wrap="square" rtlCol="0" anchor="ctr"/>
+          <a:bodyPr wrap="square" rtlCol="0" anchor="ctr">
+            <a:normAutofit/>
+          </a:bodyPr>
           <a:lstStyle/>
           <a:p>
             <a:pPr indent="0" marL="0">
@@ -4695,7 +4859,9 @@
           <a:ln/>
         </p:spPr>
         <p:txBody>
-          <a:bodyPr wrap="square" rtlCol="0" anchor="t"/>
+          <a:bodyPr wrap="square" rtlCol="0" anchor="t">
+            <a:normAutofit/>
+          </a:bodyPr>
           <a:lstStyle/>
           <a:p>
             <a:pPr indent="0" marL="0">
@@ -4743,7 +4909,9 @@
           </a:ln>
         </p:spPr>
         <p:txBody>
-          <a:bodyPr/>
+          <a:bodyPr wrap="square">
+            <a:normAutofit/>
+          </a:bodyPr>
           <a:p/>
         </p:txBody>
       </p:sp>
@@ -4765,7 +4933,9 @@
           <a:ln/>
         </p:spPr>
         <p:txBody>
-          <a:bodyPr wrap="square" rtlCol="0" anchor="ctr"/>
+          <a:bodyPr wrap="square" rtlCol="0" anchor="ctr">
+            <a:normAutofit/>
+          </a:bodyPr>
           <a:lstStyle/>
           <a:p>
             <a:pPr indent="0" marL="0">
@@ -4804,7 +4974,9 @@
           <a:ln/>
         </p:spPr>
         <p:txBody>
-          <a:bodyPr wrap="square" rtlCol="0" anchor="t"/>
+          <a:bodyPr wrap="square" rtlCol="0" anchor="t">
+            <a:normAutofit/>
+          </a:bodyPr>
           <a:lstStyle/>
           <a:p>
             <a:pPr indent="0" marL="0">
@@ -4843,7 +5015,9 @@
           <a:ln/>
         </p:spPr>
         <p:txBody>
-          <a:bodyPr wrap="square" rtlCol="0" anchor="t"/>
+          <a:bodyPr wrap="square" rtlCol="0" anchor="t">
+            <a:normAutofit/>
+          </a:bodyPr>
           <a:lstStyle/>
           <a:p>
             <a:pPr indent="0" marL="0">
@@ -4882,7 +5056,9 @@
           <a:ln/>
         </p:spPr>
         <p:txBody>
-          <a:bodyPr wrap="square" rtlCol="0" anchor="t"/>
+          <a:bodyPr wrap="square" rtlCol="0" anchor="t">
+            <a:normAutofit/>
+          </a:bodyPr>
           <a:lstStyle/>
           <a:p>
             <a:pPr indent="0" marL="0">
@@ -4921,7 +5097,9 @@
           <a:ln/>
         </p:spPr>
         <p:txBody>
-          <a:bodyPr wrap="square" rtlCol="0" anchor="ctr"/>
+          <a:bodyPr wrap="square" rtlCol="0" anchor="ctr">
+            <a:normAutofit/>
+          </a:bodyPr>
           <a:lstStyle/>
           <a:p>
             <a:pPr algn="r" indent="0" marL="0">
@@ -4992,7 +5170,9 @@
           </a:ln>
         </p:spPr>
         <p:txBody>
-          <a:bodyPr/>
+          <a:bodyPr wrap="square">
+            <a:normAutofit/>
+          </a:bodyPr>
           <a:p/>
         </p:txBody>
       </p:sp>
@@ -5021,7 +5201,9 @@
           </a:ln>
         </p:spPr>
         <p:txBody>
-          <a:bodyPr/>
+          <a:bodyPr wrap="square">
+            <a:normAutofit/>
+          </a:bodyPr>
           <a:p/>
         </p:txBody>
       </p:sp>
@@ -5052,7 +5234,9 @@
           </a:ln>
         </p:spPr>
         <p:txBody>
-          <a:bodyPr/>
+          <a:bodyPr wrap="square">
+            <a:normAutofit/>
+          </a:bodyPr>
           <a:p/>
         </p:txBody>
       </p:sp>
@@ -5074,7 +5258,9 @@
           <a:ln/>
         </p:spPr>
         <p:txBody>
-          <a:bodyPr wrap="square" rtlCol="0" anchor="ctr"/>
+          <a:bodyPr wrap="square" rtlCol="0" anchor="ctr">
+            <a:normAutofit/>
+          </a:bodyPr>
           <a:lstStyle/>
           <a:p>
             <a:pPr algn="ctr" indent="0" marL="0">
@@ -5113,7 +5299,9 @@
           <a:ln/>
         </p:spPr>
         <p:txBody>
-          <a:bodyPr wrap="square" rtlCol="0" anchor="ctr"/>
+          <a:bodyPr wrap="square" rtlCol="0" anchor="ctr">
+            <a:normAutofit/>
+          </a:bodyPr>
           <a:lstStyle/>
           <a:p>
             <a:pPr indent="0" marL="0">
@@ -5152,7 +5340,9 @@
           <a:ln/>
         </p:spPr>
         <p:txBody>
-          <a:bodyPr wrap="square" rtlCol="0" anchor="ctr"/>
+          <a:bodyPr wrap="square" rtlCol="0" anchor="ctr">
+            <a:normAutofit/>
+          </a:bodyPr>
           <a:lstStyle/>
           <a:p>
             <a:pPr indent="0" marL="0">
@@ -5200,7 +5390,9 @@
           </a:ln>
         </p:spPr>
         <p:txBody>
-          <a:bodyPr/>
+          <a:bodyPr wrap="square">
+            <a:normAutofit/>
+          </a:bodyPr>
           <a:p/>
         </p:txBody>
       </p:sp>
@@ -5222,7 +5414,9 @@
           <a:ln/>
         </p:spPr>
         <p:txBody>
-          <a:bodyPr wrap="square" rtlCol="0" anchor="ctr"/>
+          <a:bodyPr wrap="square" rtlCol="0" anchor="ctr">
+            <a:normAutofit/>
+          </a:bodyPr>
           <a:lstStyle/>
           <a:p>
             <a:pPr indent="0" marL="0">
@@ -5261,7 +5455,9 @@
           <a:ln/>
         </p:spPr>
         <p:txBody>
-          <a:bodyPr wrap="square" rtlCol="0" anchor="t"/>
+          <a:bodyPr wrap="square" rtlCol="0" anchor="t">
+            <a:normAutofit/>
+          </a:bodyPr>
           <a:lstStyle/>
           <a:p>
             <a:pPr indent="0" marL="0">
@@ -5572,7 +5768,9 @@
           <a:ln/>
         </p:spPr>
         <p:txBody>
-          <a:bodyPr wrap="square" rtlCol="0" anchor="ctr"/>
+          <a:bodyPr wrap="square" rtlCol="0" anchor="ctr">
+            <a:normAutofit/>
+          </a:bodyPr>
           <a:lstStyle/>
           <a:p>
             <a:pPr algn="r" indent="0" marL="0">
@@ -5643,7 +5841,9 @@
           </a:ln>
         </p:spPr>
         <p:txBody>
-          <a:bodyPr/>
+          <a:bodyPr wrap="square">
+            <a:normAutofit/>
+          </a:bodyPr>
           <a:p/>
         </p:txBody>
       </p:sp>
@@ -5672,7 +5872,9 @@
           </a:ln>
         </p:spPr>
         <p:txBody>
-          <a:bodyPr/>
+          <a:bodyPr wrap="square">
+            <a:normAutofit/>
+          </a:bodyPr>
           <a:p/>
         </p:txBody>
       </p:sp>
@@ -5703,7 +5905,9 @@
           </a:ln>
         </p:spPr>
         <p:txBody>
-          <a:bodyPr/>
+          <a:bodyPr wrap="square">
+            <a:normAutofit/>
+          </a:bodyPr>
           <a:p/>
         </p:txBody>
       </p:sp>
@@ -5725,7 +5929,9 @@
           <a:ln/>
         </p:spPr>
         <p:txBody>
-          <a:bodyPr wrap="square" rtlCol="0" anchor="ctr"/>
+          <a:bodyPr wrap="square" rtlCol="0" anchor="ctr">
+            <a:normAutofit/>
+          </a:bodyPr>
           <a:lstStyle/>
           <a:p>
             <a:pPr algn="ctr" indent="0" marL="0">
@@ -5764,7 +5970,9 @@
           <a:ln/>
         </p:spPr>
         <p:txBody>
-          <a:bodyPr wrap="square" rtlCol="0" anchor="ctr"/>
+          <a:bodyPr wrap="square" rtlCol="0" anchor="ctr">
+            <a:normAutofit/>
+          </a:bodyPr>
           <a:lstStyle/>
           <a:p>
             <a:pPr indent="0" marL="0">
@@ -5803,7 +6011,9 @@
           <a:ln/>
         </p:spPr>
         <p:txBody>
-          <a:bodyPr wrap="square" rtlCol="0" anchor="ctr"/>
+          <a:bodyPr wrap="square" rtlCol="0" anchor="ctr">
+            <a:normAutofit/>
+          </a:bodyPr>
           <a:lstStyle/>
           <a:p>
             <a:pPr indent="0" marL="0">
@@ -5851,7 +6061,9 @@
           </a:ln>
         </p:spPr>
         <p:txBody>
-          <a:bodyPr/>
+          <a:bodyPr wrap="square">
+            <a:normAutofit/>
+          </a:bodyPr>
           <a:p/>
         </p:txBody>
       </p:sp>
@@ -5873,7 +6085,9 @@
           <a:ln/>
         </p:spPr>
         <p:txBody>
-          <a:bodyPr wrap="square" rtlCol="0" anchor="ctr"/>
+          <a:bodyPr wrap="square" rtlCol="0" anchor="ctr">
+            <a:normAutofit/>
+          </a:bodyPr>
           <a:lstStyle/>
           <a:p>
             <a:pPr indent="0" marL="0">
@@ -5912,7 +6126,9 @@
           <a:ln/>
         </p:spPr>
         <p:txBody>
-          <a:bodyPr wrap="square" rtlCol="0" anchor="ctr"/>
+          <a:bodyPr wrap="square" rtlCol="0" anchor="ctr">
+            <a:normAutofit/>
+          </a:bodyPr>
           <a:lstStyle/>
           <a:p>
             <a:pPr indent="0" marL="0">
@@ -5951,7 +6167,9 @@
           <a:ln/>
         </p:spPr>
         <p:txBody>
-          <a:bodyPr wrap="square" rtlCol="0" anchor="t"/>
+          <a:bodyPr wrap="square" rtlCol="0" anchor="t">
+            <a:normAutofit/>
+          </a:bodyPr>
           <a:lstStyle/>
           <a:p>
             <a:pPr indent="0" marL="0">
@@ -5990,7 +6208,9 @@
           <a:ln/>
         </p:spPr>
         <p:txBody>
-          <a:bodyPr wrap="square" rtlCol="0" anchor="ctr"/>
+          <a:bodyPr wrap="square" rtlCol="0" anchor="ctr">
+            <a:normAutofit/>
+          </a:bodyPr>
           <a:lstStyle/>
           <a:p>
             <a:pPr indent="0" marL="0">
@@ -6029,7 +6249,9 @@
           <a:ln/>
         </p:spPr>
         <p:txBody>
-          <a:bodyPr wrap="square" rtlCol="0" anchor="t"/>
+          <a:bodyPr wrap="square" rtlCol="0" anchor="t">
+            <a:normAutofit/>
+          </a:bodyPr>
           <a:lstStyle/>
           <a:p>
             <a:pPr indent="0" marL="0">
@@ -6068,7 +6290,9 @@
           <a:ln/>
         </p:spPr>
         <p:txBody>
-          <a:bodyPr wrap="square" rtlCol="0" anchor="ctr"/>
+          <a:bodyPr wrap="square" rtlCol="0" anchor="ctr">
+            <a:normAutofit/>
+          </a:bodyPr>
           <a:lstStyle/>
           <a:p>
             <a:pPr indent="0" marL="0">
@@ -6107,7 +6331,9 @@
           <a:ln/>
         </p:spPr>
         <p:txBody>
-          <a:bodyPr wrap="square" rtlCol="0" anchor="t"/>
+          <a:bodyPr wrap="square" rtlCol="0" anchor="t">
+            <a:normAutofit/>
+          </a:bodyPr>
           <a:lstStyle/>
           <a:p>
             <a:pPr indent="0" marL="0">
@@ -6155,7 +6381,9 @@
           </a:ln>
         </p:spPr>
         <p:txBody>
-          <a:bodyPr/>
+          <a:bodyPr wrap="square">
+            <a:normAutofit/>
+          </a:bodyPr>
           <a:p/>
         </p:txBody>
       </p:sp>
@@ -6177,7 +6405,9 @@
           <a:ln/>
         </p:spPr>
         <p:txBody>
-          <a:bodyPr wrap="square" rtlCol="0" anchor="ctr"/>
+          <a:bodyPr wrap="square" rtlCol="0" anchor="ctr">
+            <a:normAutofit/>
+          </a:bodyPr>
           <a:lstStyle/>
           <a:p>
             <a:pPr indent="0" marL="0">
@@ -6216,7 +6446,9 @@
           <a:ln/>
         </p:spPr>
         <p:txBody>
-          <a:bodyPr wrap="square" rtlCol="0" anchor="t"/>
+          <a:bodyPr wrap="square" rtlCol="0" anchor="t">
+            <a:normAutofit/>
+          </a:bodyPr>
           <a:lstStyle/>
           <a:p>
             <a:pPr indent="0" marL="0">
@@ -6255,7 +6487,9 @@
           <a:ln/>
         </p:spPr>
         <p:txBody>
-          <a:bodyPr wrap="square" rtlCol="0" anchor="t"/>
+          <a:bodyPr wrap="square" rtlCol="0" anchor="t">
+            <a:normAutofit/>
+          </a:bodyPr>
           <a:lstStyle/>
           <a:p>
             <a:pPr indent="0" marL="0">
@@ -6294,7 +6528,9 @@
           <a:ln/>
         </p:spPr>
         <p:txBody>
-          <a:bodyPr wrap="square" rtlCol="0" anchor="t"/>
+          <a:bodyPr wrap="square" rtlCol="0" anchor="t">
+            <a:normAutofit/>
+          </a:bodyPr>
           <a:lstStyle/>
           <a:p>
             <a:pPr indent="0" marL="0">
@@ -6333,7 +6569,9 @@
           <a:ln/>
         </p:spPr>
         <p:txBody>
-          <a:bodyPr wrap="square" rtlCol="0" anchor="ctr"/>
+          <a:bodyPr wrap="square" rtlCol="0" anchor="ctr">
+            <a:normAutofit/>
+          </a:bodyPr>
           <a:lstStyle/>
           <a:p>
             <a:pPr algn="r" indent="0" marL="0">
@@ -6404,7 +6642,9 @@
           </a:ln>
         </p:spPr>
         <p:txBody>
-          <a:bodyPr/>
+          <a:bodyPr wrap="square">
+            <a:normAutofit/>
+          </a:bodyPr>
           <a:p/>
         </p:txBody>
       </p:sp>
@@ -6433,7 +6673,9 @@
           </a:ln>
         </p:spPr>
         <p:txBody>
-          <a:bodyPr/>
+          <a:bodyPr wrap="square">
+            <a:normAutofit/>
+          </a:bodyPr>
           <a:p/>
         </p:txBody>
       </p:sp>
@@ -6464,7 +6706,9 @@
           </a:ln>
         </p:spPr>
         <p:txBody>
-          <a:bodyPr/>
+          <a:bodyPr wrap="square">
+            <a:normAutofit/>
+          </a:bodyPr>
           <a:p/>
         </p:txBody>
       </p:sp>
@@ -6486,7 +6730,9 @@
           <a:ln/>
         </p:spPr>
         <p:txBody>
-          <a:bodyPr wrap="square" rtlCol="0" anchor="ctr"/>
+          <a:bodyPr wrap="square" rtlCol="0" anchor="ctr">
+            <a:normAutofit/>
+          </a:bodyPr>
           <a:lstStyle/>
           <a:p>
             <a:pPr algn="ctr" indent="0" marL="0">
@@ -6525,7 +6771,9 @@
           <a:ln/>
         </p:spPr>
         <p:txBody>
-          <a:bodyPr wrap="square" rtlCol="0" anchor="ctr"/>
+          <a:bodyPr wrap="square" rtlCol="0" anchor="ctr">
+            <a:normAutofit/>
+          </a:bodyPr>
           <a:lstStyle/>
           <a:p>
             <a:pPr indent="0" marL="0">
@@ -6564,7 +6812,9 @@
           <a:ln/>
         </p:spPr>
         <p:txBody>
-          <a:bodyPr wrap="square" rtlCol="0" anchor="ctr"/>
+          <a:bodyPr wrap="square" rtlCol="0" anchor="ctr">
+            <a:normAutofit/>
+          </a:bodyPr>
           <a:lstStyle/>
           <a:p>
             <a:pPr indent="0" marL="0">
@@ -6612,7 +6862,9 @@
           </a:ln>
         </p:spPr>
         <p:txBody>
-          <a:bodyPr/>
+          <a:bodyPr wrap="square">
+            <a:normAutofit/>
+          </a:bodyPr>
           <a:p/>
         </p:txBody>
       </p:sp>
@@ -6634,7 +6886,9 @@
           <a:ln/>
         </p:spPr>
         <p:txBody>
-          <a:bodyPr wrap="square" rtlCol="0" anchor="ctr"/>
+          <a:bodyPr wrap="square" rtlCol="0" anchor="ctr">
+            <a:normAutofit/>
+          </a:bodyPr>
           <a:lstStyle/>
           <a:p>
             <a:pPr indent="0" marL="0">
@@ -6673,7 +6927,9 @@
           <a:ln/>
         </p:spPr>
         <p:txBody>
-          <a:bodyPr wrap="square" rtlCol="0" anchor="ctr"/>
+          <a:bodyPr wrap="square" rtlCol="0" anchor="ctr">
+            <a:normAutofit/>
+          </a:bodyPr>
           <a:lstStyle/>
           <a:p>
             <a:pPr indent="0" marL="0">
@@ -6712,7 +6968,9 @@
           <a:ln/>
         </p:spPr>
         <p:txBody>
-          <a:bodyPr wrap="square" rtlCol="0" anchor="t"/>
+          <a:bodyPr wrap="square" rtlCol="0" anchor="t">
+            <a:normAutofit/>
+          </a:bodyPr>
           <a:lstStyle/>
           <a:p>
             <a:pPr indent="0" marL="0">
@@ -6751,7 +7009,9 @@
           <a:ln/>
         </p:spPr>
         <p:txBody>
-          <a:bodyPr wrap="square" rtlCol="0" anchor="ctr"/>
+          <a:bodyPr wrap="square" rtlCol="0" anchor="ctr">
+            <a:normAutofit/>
+          </a:bodyPr>
           <a:lstStyle/>
           <a:p>
             <a:pPr indent="0" marL="0">
@@ -6790,7 +7050,9 @@
           <a:ln/>
         </p:spPr>
         <p:txBody>
-          <a:bodyPr wrap="square" rtlCol="0" anchor="t"/>
+          <a:bodyPr wrap="square" rtlCol="0" anchor="t">
+            <a:normAutofit/>
+          </a:bodyPr>
           <a:lstStyle/>
           <a:p>
             <a:pPr indent="0" marL="0">
@@ -6829,7 +7091,9 @@
           <a:ln/>
         </p:spPr>
         <p:txBody>
-          <a:bodyPr wrap="square" rtlCol="0" anchor="ctr"/>
+          <a:bodyPr wrap="square" rtlCol="0" anchor="ctr">
+            <a:normAutofit/>
+          </a:bodyPr>
           <a:lstStyle/>
           <a:p>
             <a:pPr indent="0" marL="0">
@@ -6868,7 +7132,9 @@
           <a:ln/>
         </p:spPr>
         <p:txBody>
-          <a:bodyPr wrap="square" rtlCol="0" anchor="t"/>
+          <a:bodyPr wrap="square" rtlCol="0" anchor="t">
+            <a:normAutofit/>
+          </a:bodyPr>
           <a:lstStyle/>
           <a:p>
             <a:pPr indent="0" marL="0">
@@ -6916,7 +7182,9 @@
           </a:ln>
         </p:spPr>
         <p:txBody>
-          <a:bodyPr/>
+          <a:bodyPr wrap="square">
+            <a:normAutofit/>
+          </a:bodyPr>
           <a:p/>
         </p:txBody>
       </p:sp>
@@ -6938,7 +7206,9 @@
           <a:ln/>
         </p:spPr>
         <p:txBody>
-          <a:bodyPr wrap="square" rtlCol="0" anchor="ctr"/>
+          <a:bodyPr wrap="square" rtlCol="0" anchor="ctr">
+            <a:normAutofit/>
+          </a:bodyPr>
           <a:lstStyle/>
           <a:p>
             <a:pPr indent="0" marL="0">
@@ -6977,7 +7247,9 @@
           <a:ln/>
         </p:spPr>
         <p:txBody>
-          <a:bodyPr wrap="square" rtlCol="0" anchor="t"/>
+          <a:bodyPr wrap="square" rtlCol="0" anchor="t">
+            <a:normAutofit/>
+          </a:bodyPr>
           <a:lstStyle/>
           <a:p>
             <a:pPr indent="0" marL="0">
@@ -7016,7 +7288,9 @@
           <a:ln/>
         </p:spPr>
         <p:txBody>
-          <a:bodyPr wrap="square" rtlCol="0" anchor="t"/>
+          <a:bodyPr wrap="square" rtlCol="0" anchor="t">
+            <a:normAutofit/>
+          </a:bodyPr>
           <a:lstStyle/>
           <a:p>
             <a:pPr indent="0" marL="0">
@@ -7055,7 +7329,9 @@
           <a:ln/>
         </p:spPr>
         <p:txBody>
-          <a:bodyPr wrap="square" rtlCol="0" anchor="t"/>
+          <a:bodyPr wrap="square" rtlCol="0" anchor="t">
+            <a:normAutofit/>
+          </a:bodyPr>
           <a:lstStyle/>
           <a:p>
             <a:pPr indent="0" marL="0">
@@ -7094,7 +7370,9 @@
           <a:ln/>
         </p:spPr>
         <p:txBody>
-          <a:bodyPr wrap="square" rtlCol="0" anchor="ctr"/>
+          <a:bodyPr wrap="square" rtlCol="0" anchor="ctr">
+            <a:normAutofit/>
+          </a:bodyPr>
           <a:lstStyle/>
           <a:p>
             <a:pPr algn="r" indent="0" marL="0">

--- a/pptx_sessions_8_22/第9回_基礎編_講師用.pptx
+++ b/pptx_sessions_8_22/第9回_基礎編_講師用.pptx
@@ -1961,7 +1961,7 @@
               <a:buNone/>
             </a:pPr>
             <a:r>
-              <a:rPr lang="en-US" sz="2000" dirty="0">
+              <a:rPr lang="en-US" sz="1400" dirty="0">
                 <a:solidFill>
                   <a:srgbClr val="555555"/>
                 </a:solidFill>
@@ -2452,7 +2452,7 @@
         <p:spPr>
           <a:xfrm>
             <a:off x="11338560" y="6565392"/>
-            <a:ext cx="640080" cy="274320"/>
+            <a:ext cx="640080" cy="329184"/>
           </a:xfrm>
           <a:prstGeom prst="rect">
             <a:avLst/>
@@ -2470,7 +2470,7 @@
               <a:buNone/>
             </a:pPr>
             <a:r>
-              <a:rPr lang="en-US" sz="1400" dirty="0">
+              <a:rPr lang="en-US" sz="1100" dirty="0">
                 <a:solidFill>
                   <a:srgbClr val="888888"/>
                 </a:solidFill>
@@ -3735,7 +3735,7 @@
         <p:spPr>
           <a:xfrm>
             <a:off x="11338560" y="6565392"/>
-            <a:ext cx="640080" cy="274320"/>
+            <a:ext cx="640080" cy="329184"/>
           </a:xfrm>
           <a:prstGeom prst="rect">
             <a:avLst/>
@@ -3753,7 +3753,7 @@
               <a:buNone/>
             </a:pPr>
             <a:r>
-              <a:rPr lang="en-US" sz="1400" dirty="0">
+              <a:rPr lang="en-US" sz="1100" dirty="0">
                 <a:solidFill>
                   <a:srgbClr val="888888"/>
                 </a:solidFill>
@@ -3996,7 +3996,7 @@
               <a:buNone/>
             </a:pPr>
             <a:r>
-              <a:rPr lang="en-US" sz="2200" b="1" dirty="0">
+              <a:rPr lang="en-US" sz="1400" b="1" dirty="0">
                 <a:solidFill>
                   <a:srgbClr val="1F3A5F"/>
                 </a:solidFill>
@@ -4111,7 +4111,7 @@
               <a:buNone/>
             </a:pPr>
             <a:r>
-              <a:rPr lang="en-US" sz="2000" dirty="0">
+              <a:rPr lang="en-US" sz="1600" dirty="0">
                 <a:solidFill>
                   <a:srgbClr val="222222"/>
                 </a:solidFill>
@@ -4128,7 +4128,7 @@
               <a:buNone/>
             </a:pPr>
             <a:r>
-              <a:rPr lang="en-US" sz="2000" dirty="0">
+              <a:rPr lang="en-US" sz="1600" dirty="0">
                 <a:solidFill>
                   <a:srgbClr val="222222"/>
                 </a:solidFill>
@@ -4145,7 +4145,7 @@
               <a:buNone/>
             </a:pPr>
             <a:r>
-              <a:rPr lang="en-US" sz="2000" dirty="0">
+              <a:rPr lang="en-US" sz="1600" dirty="0">
                 <a:solidFill>
                   <a:srgbClr val="222222"/>
                 </a:solidFill>
@@ -4162,7 +4162,7 @@
               <a:buNone/>
             </a:pPr>
             <a:r>
-              <a:rPr lang="en-US" sz="2000" dirty="0">
+              <a:rPr lang="en-US" sz="1600" dirty="0">
                 <a:solidFill>
                   <a:srgbClr val="222222"/>
                 </a:solidFill>
@@ -4179,7 +4179,7 @@
               <a:buNone/>
             </a:pPr>
             <a:r>
-              <a:rPr lang="en-US" sz="2000" dirty="0">
+              <a:rPr lang="en-US" sz="1600" dirty="0">
                 <a:solidFill>
                   <a:srgbClr val="222222"/>
                 </a:solidFill>
@@ -4196,7 +4196,7 @@
               <a:buNone/>
             </a:pPr>
             <a:r>
-              <a:rPr lang="en-US" sz="2000" dirty="0">
+              <a:rPr lang="en-US" sz="1600" dirty="0">
                 <a:solidFill>
                   <a:srgbClr val="222222"/>
                 </a:solidFill>
@@ -4213,7 +4213,7 @@
               <a:buNone/>
             </a:pPr>
             <a:r>
-              <a:rPr lang="en-US" sz="2000" dirty="0">
+              <a:rPr lang="en-US" sz="1600" dirty="0">
                 <a:solidFill>
                   <a:srgbClr val="222222"/>
                 </a:solidFill>
@@ -4230,7 +4230,7 @@
               <a:buNone/>
             </a:pPr>
             <a:r>
-              <a:rPr lang="en-US" sz="2000" dirty="0">
+              <a:rPr lang="en-US" sz="1600" dirty="0">
                 <a:solidFill>
                   <a:srgbClr val="222222"/>
                 </a:solidFill>
@@ -4247,7 +4247,7 @@
               <a:buNone/>
             </a:pPr>
             <a:r>
-              <a:rPr lang="en-US" sz="2000" dirty="0">
+              <a:rPr lang="en-US" sz="1600" dirty="0">
                 <a:solidFill>
                   <a:srgbClr val="222222"/>
                 </a:solidFill>
@@ -4264,7 +4264,7 @@
               <a:buNone/>
             </a:pPr>
             <a:r>
-              <a:rPr lang="en-US" sz="2000" dirty="0">
+              <a:rPr lang="en-US" sz="1600" dirty="0">
                 <a:solidFill>
                   <a:srgbClr val="222222"/>
                 </a:solidFill>
@@ -4287,7 +4287,7 @@
         <p:spPr>
           <a:xfrm>
             <a:off x="11338560" y="6565392"/>
-            <a:ext cx="640080" cy="274320"/>
+            <a:ext cx="640080" cy="329184"/>
           </a:xfrm>
           <a:prstGeom prst="rect">
             <a:avLst/>
@@ -4305,7 +4305,7 @@
               <a:buNone/>
             </a:pPr>
             <a:r>
-              <a:rPr lang="en-US" sz="1400" dirty="0">
+              <a:rPr lang="en-US" sz="1100" dirty="0">
                 <a:solidFill>
                   <a:srgbClr val="888888"/>
                 </a:solidFill>
@@ -4548,7 +4548,7 @@
               <a:buNone/>
             </a:pPr>
             <a:r>
-              <a:rPr lang="en-US" sz="2000" dirty="0">
+              <a:rPr lang="en-US" sz="1400" dirty="0">
                 <a:solidFill>
                   <a:srgbClr val="222222"/>
                 </a:solidFill>
@@ -4704,7 +4704,7 @@
               <a:buNone/>
             </a:pPr>
             <a:r>
-              <a:rPr lang="en-US" sz="2000" dirty="0">
+              <a:rPr lang="en-US" sz="1400" dirty="0">
                 <a:solidFill>
                   <a:srgbClr val="222222"/>
                 </a:solidFill>
@@ -4786,7 +4786,7 @@
               <a:buNone/>
             </a:pPr>
             <a:r>
-              <a:rPr lang="en-US" sz="2000" dirty="0">
+              <a:rPr lang="en-US" sz="1400" dirty="0">
                 <a:solidFill>
                   <a:srgbClr val="222222"/>
                 </a:solidFill>
@@ -4868,7 +4868,7 @@
               <a:buNone/>
             </a:pPr>
             <a:r>
-              <a:rPr lang="en-US" sz="2000" dirty="0">
+              <a:rPr lang="en-US" sz="1400" dirty="0">
                 <a:solidFill>
                   <a:srgbClr val="222222"/>
                 </a:solidFill>
@@ -4964,8 +4964,8 @@
         </p:nvSpPr>
         <p:spPr>
           <a:xfrm>
-            <a:off x="731520" y="5852160"/>
-            <a:ext cx="10881360" cy="213360"/>
+            <a:off x="731520" y="5669280"/>
+            <a:ext cx="10881360" cy="310896"/>
           </a:xfrm>
           <a:prstGeom prst="rect">
             <a:avLst/>
@@ -4983,7 +4983,7 @@
               <a:buNone/>
             </a:pPr>
             <a:r>
-              <a:rPr lang="en-US" sz="2000" dirty="0">
+              <a:rPr lang="en-US" sz="1100" dirty="0">
                 <a:solidFill>
                   <a:srgbClr val="222222"/>
                 </a:solidFill>
@@ -5005,8 +5005,8 @@
         </p:nvSpPr>
         <p:spPr>
           <a:xfrm>
-            <a:off x="731520" y="6065520"/>
-            <a:ext cx="10881360" cy="213360"/>
+            <a:off x="731520" y="6007608"/>
+            <a:ext cx="10881360" cy="310896"/>
           </a:xfrm>
           <a:prstGeom prst="rect">
             <a:avLst/>
@@ -5024,7 +5024,7 @@
               <a:buNone/>
             </a:pPr>
             <a:r>
-              <a:rPr lang="en-US" sz="2000" dirty="0">
+              <a:rPr lang="en-US" sz="1100" dirty="0">
                 <a:solidFill>
                   <a:srgbClr val="222222"/>
                 </a:solidFill>
@@ -5046,8 +5046,8 @@
         </p:nvSpPr>
         <p:spPr>
           <a:xfrm>
-            <a:off x="731520" y="6278880"/>
-            <a:ext cx="10881360" cy="213360"/>
+            <a:off x="731520" y="6345936"/>
+            <a:ext cx="10881360" cy="310896"/>
           </a:xfrm>
           <a:prstGeom prst="rect">
             <a:avLst/>
@@ -5065,7 +5065,7 @@
               <a:buNone/>
             </a:pPr>
             <a:r>
-              <a:rPr lang="en-US" sz="2000" dirty="0">
+              <a:rPr lang="en-US" sz="1100" dirty="0">
                 <a:solidFill>
                   <a:srgbClr val="222222"/>
                 </a:solidFill>
@@ -5088,7 +5088,7 @@
         <p:spPr>
           <a:xfrm>
             <a:off x="11338560" y="6565392"/>
-            <a:ext cx="640080" cy="274320"/>
+            <a:ext cx="640080" cy="329184"/>
           </a:xfrm>
           <a:prstGeom prst="rect">
             <a:avLst/>
@@ -5106,7 +5106,7 @@
               <a:buNone/>
             </a:pPr>
             <a:r>
-              <a:rPr lang="en-US" sz="1400" dirty="0">
+              <a:rPr lang="en-US" sz="1100" dirty="0">
                 <a:solidFill>
                   <a:srgbClr val="888888"/>
                 </a:solidFill>
@@ -5464,7 +5464,7 @@
               <a:buNone/>
             </a:pPr>
             <a:r>
-              <a:rPr lang="en-US" sz="2000" dirty="0">
+              <a:rPr lang="en-US" sz="1300" dirty="0">
                 <a:solidFill>
                   <a:srgbClr val="222222"/>
                 </a:solidFill>
@@ -5481,7 +5481,7 @@
               <a:buNone/>
             </a:pPr>
             <a:r>
-              <a:rPr lang="en-US" sz="2000" dirty="0">
+              <a:rPr lang="en-US" sz="1300" dirty="0">
                 <a:solidFill>
                   <a:srgbClr val="222222"/>
                 </a:solidFill>
@@ -5498,7 +5498,7 @@
               <a:buNone/>
             </a:pPr>
             <a:r>
-              <a:rPr lang="en-US" sz="2000" dirty="0">
+              <a:rPr lang="en-US" sz="1300" dirty="0">
                 <a:solidFill>
                   <a:srgbClr val="222222"/>
                 </a:solidFill>
@@ -5515,7 +5515,7 @@
               <a:buNone/>
             </a:pPr>
             <a:r>
-              <a:rPr lang="en-US" sz="2000" dirty="0">
+              <a:rPr lang="en-US" sz="1300" dirty="0">
                 <a:solidFill>
                   <a:srgbClr val="222222"/>
                 </a:solidFill>
@@ -5532,7 +5532,7 @@
               <a:buNone/>
             </a:pPr>
             <a:r>
-              <a:rPr lang="en-US" sz="2000" dirty="0">
+              <a:rPr lang="en-US" sz="1300" dirty="0">
                 <a:solidFill>
                   <a:srgbClr val="222222"/>
                 </a:solidFill>
@@ -5549,7 +5549,7 @@
               <a:buNone/>
             </a:pPr>
             <a:r>
-              <a:rPr lang="en-US" sz="2000" dirty="0">
+              <a:rPr lang="en-US" sz="1300" dirty="0">
                 <a:solidFill>
                   <a:srgbClr val="222222"/>
                 </a:solidFill>
@@ -5566,7 +5566,7 @@
               <a:buNone/>
             </a:pPr>
             <a:r>
-              <a:rPr lang="en-US" sz="2000" dirty="0">
+              <a:rPr lang="en-US" sz="1300" dirty="0">
                 <a:solidFill>
                   <a:srgbClr val="222222"/>
                 </a:solidFill>
@@ -5583,7 +5583,7 @@
               <a:buNone/>
             </a:pPr>
             <a:r>
-              <a:rPr lang="en-US" sz="2000" dirty="0">
+              <a:rPr lang="en-US" sz="1300" dirty="0">
                 <a:solidFill>
                   <a:srgbClr val="222222"/>
                 </a:solidFill>
@@ -5600,7 +5600,7 @@
               <a:buNone/>
             </a:pPr>
             <a:r>
-              <a:rPr lang="en-US" sz="2000" dirty="0">
+              <a:rPr lang="en-US" sz="1300" dirty="0">
                 <a:solidFill>
                   <a:srgbClr val="222222"/>
                 </a:solidFill>
@@ -5617,7 +5617,7 @@
               <a:buNone/>
             </a:pPr>
             <a:r>
-              <a:rPr lang="en-US" sz="2000" dirty="0">
+              <a:rPr lang="en-US" sz="1300" dirty="0">
                 <a:solidFill>
                   <a:srgbClr val="222222"/>
                 </a:solidFill>
@@ -5634,7 +5634,7 @@
               <a:buNone/>
             </a:pPr>
             <a:r>
-              <a:rPr lang="en-US" sz="2000" dirty="0">
+              <a:rPr lang="en-US" sz="1300" dirty="0">
                 <a:solidFill>
                   <a:srgbClr val="222222"/>
                 </a:solidFill>
@@ -5651,7 +5651,7 @@
               <a:buNone/>
             </a:pPr>
             <a:r>
-              <a:rPr lang="en-US" sz="2000" dirty="0">
+              <a:rPr lang="en-US" sz="1300" dirty="0">
                 <a:solidFill>
                   <a:srgbClr val="222222"/>
                 </a:solidFill>
@@ -5668,7 +5668,7 @@
               <a:buNone/>
             </a:pPr>
             <a:r>
-              <a:rPr lang="en-US" sz="2000" dirty="0">
+              <a:rPr lang="en-US" sz="1300" dirty="0">
                 <a:solidFill>
                   <a:srgbClr val="222222"/>
                 </a:solidFill>
@@ -5685,7 +5685,7 @@
               <a:buNone/>
             </a:pPr>
             <a:r>
-              <a:rPr lang="en-US" sz="2000" dirty="0">
+              <a:rPr lang="en-US" sz="1300" dirty="0">
                 <a:solidFill>
                   <a:srgbClr val="222222"/>
                 </a:solidFill>
@@ -5702,7 +5702,7 @@
               <a:buNone/>
             </a:pPr>
             <a:r>
-              <a:rPr lang="en-US" sz="2000" dirty="0">
+              <a:rPr lang="en-US" sz="1300" dirty="0">
                 <a:solidFill>
                   <a:srgbClr val="222222"/>
                 </a:solidFill>
@@ -5719,7 +5719,7 @@
               <a:buNone/>
             </a:pPr>
             <a:r>
-              <a:rPr lang="en-US" sz="2000" dirty="0">
+              <a:rPr lang="en-US" sz="1300" dirty="0">
                 <a:solidFill>
                   <a:srgbClr val="222222"/>
                 </a:solidFill>
@@ -5736,7 +5736,7 @@
               <a:buNone/>
             </a:pPr>
             <a:r>
-              <a:rPr lang="en-US" sz="2000" dirty="0">
+              <a:rPr lang="en-US" sz="1300" dirty="0">
                 <a:solidFill>
                   <a:srgbClr val="222222"/>
                 </a:solidFill>
@@ -5759,7 +5759,7 @@
         <p:spPr>
           <a:xfrm>
             <a:off x="11338560" y="6565392"/>
-            <a:ext cx="640080" cy="274320"/>
+            <a:ext cx="640080" cy="329184"/>
           </a:xfrm>
           <a:prstGeom prst="rect">
             <a:avLst/>
@@ -5777,7 +5777,7 @@
               <a:buNone/>
             </a:pPr>
             <a:r>
-              <a:rPr lang="en-US" sz="1400" dirty="0">
+              <a:rPr lang="en-US" sz="1100" dirty="0">
                 <a:solidFill>
                   <a:srgbClr val="888888"/>
                 </a:solidFill>
@@ -6020,7 +6020,7 @@
               <a:buNone/>
             </a:pPr>
             <a:r>
-              <a:rPr lang="en-US" sz="2000" dirty="0">
+              <a:rPr lang="en-US" sz="1400" dirty="0">
                 <a:solidFill>
                   <a:srgbClr val="222222"/>
                 </a:solidFill>
@@ -6176,7 +6176,7 @@
               <a:buNone/>
             </a:pPr>
             <a:r>
-              <a:rPr lang="en-US" sz="2000" dirty="0">
+              <a:rPr lang="en-US" sz="1400" dirty="0">
                 <a:solidFill>
                   <a:srgbClr val="222222"/>
                 </a:solidFill>
@@ -6258,7 +6258,7 @@
               <a:buNone/>
             </a:pPr>
             <a:r>
-              <a:rPr lang="en-US" sz="2000" dirty="0">
+              <a:rPr lang="en-US" sz="1400" dirty="0">
                 <a:solidFill>
                   <a:srgbClr val="222222"/>
                 </a:solidFill>
@@ -6340,7 +6340,7 @@
               <a:buNone/>
             </a:pPr>
             <a:r>
-              <a:rPr lang="en-US" sz="2000" dirty="0">
+              <a:rPr lang="en-US" sz="1400" dirty="0">
                 <a:solidFill>
                   <a:srgbClr val="222222"/>
                 </a:solidFill>
@@ -6436,8 +6436,8 @@
         </p:nvSpPr>
         <p:spPr>
           <a:xfrm>
-            <a:off x="731520" y="5852160"/>
-            <a:ext cx="10881360" cy="213360"/>
+            <a:off x="731520" y="5669280"/>
+            <a:ext cx="10881360" cy="310896"/>
           </a:xfrm>
           <a:prstGeom prst="rect">
             <a:avLst/>
@@ -6455,7 +6455,7 @@
               <a:buNone/>
             </a:pPr>
             <a:r>
-              <a:rPr lang="en-US" sz="2000" dirty="0">
+              <a:rPr lang="en-US" sz="1100" dirty="0">
                 <a:solidFill>
                   <a:srgbClr val="222222"/>
                 </a:solidFill>
@@ -6477,8 +6477,8 @@
         </p:nvSpPr>
         <p:spPr>
           <a:xfrm>
-            <a:off x="731520" y="6065520"/>
-            <a:ext cx="10881360" cy="213360"/>
+            <a:off x="731520" y="6007608"/>
+            <a:ext cx="10881360" cy="310896"/>
           </a:xfrm>
           <a:prstGeom prst="rect">
             <a:avLst/>
@@ -6496,7 +6496,7 @@
               <a:buNone/>
             </a:pPr>
             <a:r>
-              <a:rPr lang="en-US" sz="2000" dirty="0">
+              <a:rPr lang="en-US" sz="1100" dirty="0">
                 <a:solidFill>
                   <a:srgbClr val="222222"/>
                 </a:solidFill>
@@ -6518,8 +6518,8 @@
         </p:nvSpPr>
         <p:spPr>
           <a:xfrm>
-            <a:off x="731520" y="6278880"/>
-            <a:ext cx="10881360" cy="213360"/>
+            <a:off x="731520" y="6345936"/>
+            <a:ext cx="10881360" cy="310896"/>
           </a:xfrm>
           <a:prstGeom prst="rect">
             <a:avLst/>
@@ -6537,7 +6537,7 @@
               <a:buNone/>
             </a:pPr>
             <a:r>
-              <a:rPr lang="en-US" sz="2000" dirty="0">
+              <a:rPr lang="en-US" sz="1100" dirty="0">
                 <a:solidFill>
                   <a:srgbClr val="222222"/>
                 </a:solidFill>
@@ -6560,7 +6560,7 @@
         <p:spPr>
           <a:xfrm>
             <a:off x="11338560" y="6565392"/>
-            <a:ext cx="640080" cy="274320"/>
+            <a:ext cx="640080" cy="329184"/>
           </a:xfrm>
           <a:prstGeom prst="rect">
             <a:avLst/>
@@ -6578,7 +6578,7 @@
               <a:buNone/>
             </a:pPr>
             <a:r>
-              <a:rPr lang="en-US" sz="1400" dirty="0">
+              <a:rPr lang="en-US" sz="1100" dirty="0">
                 <a:solidFill>
                   <a:srgbClr val="888888"/>
                 </a:solidFill>
@@ -6977,7 +6977,7 @@
               <a:buNone/>
             </a:pPr>
             <a:r>
-              <a:rPr lang="en-US" sz="2000" dirty="0">
+              <a:rPr lang="en-US" sz="1400" dirty="0">
                 <a:solidFill>
                   <a:srgbClr val="222222"/>
                 </a:solidFill>
@@ -7237,8 +7237,8 @@
         </p:nvSpPr>
         <p:spPr>
           <a:xfrm>
-            <a:off x="731520" y="5852160"/>
-            <a:ext cx="10881360" cy="213360"/>
+            <a:off x="731520" y="5669280"/>
+            <a:ext cx="10881360" cy="310896"/>
           </a:xfrm>
           <a:prstGeom prst="rect">
             <a:avLst/>
@@ -7256,7 +7256,7 @@
               <a:buNone/>
             </a:pPr>
             <a:r>
-              <a:rPr lang="en-US" sz="2000" dirty="0">
+              <a:rPr lang="en-US" sz="1100" dirty="0">
                 <a:solidFill>
                   <a:srgbClr val="222222"/>
                 </a:solidFill>
@@ -7278,8 +7278,8 @@
         </p:nvSpPr>
         <p:spPr>
           <a:xfrm>
-            <a:off x="731520" y="6065520"/>
-            <a:ext cx="10881360" cy="213360"/>
+            <a:off x="731520" y="6007608"/>
+            <a:ext cx="10881360" cy="310896"/>
           </a:xfrm>
           <a:prstGeom prst="rect">
             <a:avLst/>
@@ -7297,7 +7297,7 @@
               <a:buNone/>
             </a:pPr>
             <a:r>
-              <a:rPr lang="en-US" sz="2000" dirty="0">
+              <a:rPr lang="en-US" sz="1100" dirty="0">
                 <a:solidFill>
                   <a:srgbClr val="222222"/>
                 </a:solidFill>
@@ -7305,7 +7305,7 @@
                 <a:ea typeface="Yu Gothic UI" pitchFamily="34" charset="-122"/>
                 <a:cs typeface="Yu Gothic UI" pitchFamily="34" charset="-120"/>
               </a:rPr>
-              <a:t>2. 出力された議事録をスプレッドシートにコピー＆ペースト</a:t>
+              <a:t>2. 各チャネルから何にどう繋がっているかを書き出す</a:t>
             </a:r>
             <a:endParaRPr lang="en-US" sz="2000" dirty="0"/>
           </a:p>
@@ -7319,8 +7319,8 @@
         </p:nvSpPr>
         <p:spPr>
           <a:xfrm>
-            <a:off x="731520" y="6278880"/>
-            <a:ext cx="10881360" cy="213360"/>
+            <a:off x="731520" y="6345936"/>
+            <a:ext cx="10881360" cy="310896"/>
           </a:xfrm>
           <a:prstGeom prst="rect">
             <a:avLst/>
@@ -7338,7 +7338,7 @@
               <a:buNone/>
             </a:pPr>
             <a:r>
-              <a:rPr lang="en-US" sz="2000" dirty="0">
+              <a:rPr lang="en-US" sz="1100" dirty="0">
                 <a:solidFill>
                   <a:srgbClr val="222222"/>
                 </a:solidFill>
@@ -7361,7 +7361,7 @@
         <p:spPr>
           <a:xfrm>
             <a:off x="11338560" y="6565392"/>
-            <a:ext cx="640080" cy="274320"/>
+            <a:ext cx="640080" cy="329184"/>
           </a:xfrm>
           <a:prstGeom prst="rect">
             <a:avLst/>
@@ -7379,7 +7379,7 @@
               <a:buNone/>
             </a:pPr>
             <a:r>
-              <a:rPr lang="en-US" sz="1400" dirty="0">
+              <a:rPr lang="en-US" sz="1100" dirty="0">
                 <a:solidFill>
                   <a:srgbClr val="888888"/>
                 </a:solidFill>
